--- a/output/wordlabs-reduce-3day.pptx
+++ b/output/wordlabs-reduce-3day.pptx
@@ -5622,7 +5622,7 @@
                 <a:ea typeface="Trebuchet MS" pitchFamily="34" charset="-122"/>
                 <a:cs typeface="Trebuchet MS" pitchFamily="34" charset="-120"/>
               </a:rPr>
-              <a:t>0</a:t>
+              <a:t>1</a:t>
             </a:r>
             <a:pPr algn="ctr" indent="0" marL="0">
               <a:buNone/>
@@ -6071,7 +6071,7 @@
                 <a:ea typeface="Calibri" pitchFamily="34" charset="-122"/>
                 <a:cs typeface="Calibri" pitchFamily="34" charset="-120"/>
               </a:rPr>
-              <a:t> in rubbish at our school showed that </a:t>
+              <a:t> in plastic bags has been helpful, and </a:t>
             </a:r>
             <a:pPr algn="l" indent="0" marL="0">
               <a:buNone/>
@@ -6102,7 +6102,7 @@
                 <a:ea typeface="Calibri" pitchFamily="34" charset="-122"/>
                 <a:cs typeface="Calibri" pitchFamily="34" charset="-120"/>
               </a:rPr>
-              <a:t> waste really makes a difference.</a:t>
+              <a:t> rubbish in our oceans is very important.</a:t>
             </a:r>
             <a:endParaRPr lang="en-US" sz="1800" dirty="0"/>
           </a:p>
@@ -7933,7 +7933,7 @@
                 <a:ea typeface="Trebuchet MS" pitchFamily="34" charset="-122"/>
                 <a:cs typeface="Trebuchet MS" pitchFamily="34" charset="-120"/>
               </a:rPr>
-              <a:t>duc</a:t>
+              <a:t>duce</a:t>
             </a:r>
             <a:endParaRPr lang="en-US" sz="1300" dirty="0"/>
           </a:p>
@@ -7980,46 +7980,7 @@
       </p:sp>
       <p:sp>
         <p:nvSpPr>
-          <p:cNvPr id="22" name="Text 20"/>
-          <p:cNvSpPr/>
-          <p:nvPr/>
-        </p:nvSpPr>
-        <p:spPr>
-          <a:xfrm>
-            <a:off x="4370832" y="2752344"/>
-            <a:ext cx="1828800" cy="182880"/>
-          </a:xfrm>
-          <a:prstGeom prst="rect">
-            <a:avLst/>
-          </a:prstGeom>
-          <a:noFill/>
-          <a:ln/>
-        </p:spPr>
-        <p:txBody>
-          <a:bodyPr wrap="square" lIns="0" tIns="0" rIns="0" bIns="0" rtlCol="0" anchor="t"/>
-          <a:lstStyle/>
-          <a:p>
-            <a:pPr algn="ctr" indent="0" marL="0">
-              <a:buNone/>
-            </a:pPr>
-            <a:r>
-              <a:rPr lang="en-US" sz="700" i="1" dirty="0">
-                <a:solidFill>
-                  <a:srgbClr val="94A3B8"/>
-                </a:solidFill>
-                <a:latin typeface="Calibri" pitchFamily="34" charset="0"/>
-                <a:ea typeface="Calibri" pitchFamily="34" charset="-122"/>
-                <a:cs typeface="Calibri" pitchFamily="34" charset="-120"/>
-              </a:rPr>
-              <a:t>'e' dropped from 'reduce' before vowel suffix</a:t>
-            </a:r>
-            <a:endParaRPr lang="en-US" sz="700" dirty="0"/>
-          </a:p>
-        </p:txBody>
-      </p:sp>
-      <p:sp>
-        <p:nvSpPr>
-          <p:cNvPr id="23" name="Shape 21"/>
+          <p:cNvPr id="22" name="Shape 20"/>
           <p:cNvSpPr/>
           <p:nvPr/>
         </p:nvSpPr>
@@ -8053,7 +8014,7 @@
       </p:sp>
       <p:sp>
         <p:nvSpPr>
-          <p:cNvPr id="24" name="Text 22"/>
+          <p:cNvPr id="23" name="Text 21"/>
           <p:cNvSpPr/>
           <p:nvPr/>
         </p:nvSpPr>
@@ -8092,7 +8053,7 @@
       </p:sp>
       <p:sp>
         <p:nvSpPr>
-          <p:cNvPr id="25" name="Text 23"/>
+          <p:cNvPr id="24" name="Text 22"/>
           <p:cNvSpPr/>
           <p:nvPr/>
         </p:nvSpPr>
@@ -8123,9 +8084,48 @@
                 <a:ea typeface="Calibri" pitchFamily="34" charset="-122"/>
                 <a:cs typeface="Calibri" pitchFamily="34" charset="-120"/>
               </a:rPr>
-              <a:t>act or process of</a:t>
+              <a:t>act or result of</a:t>
             </a:r>
             <a:endParaRPr lang="en-US" sz="850" dirty="0"/>
+          </a:p>
+        </p:txBody>
+      </p:sp>
+      <p:sp>
+        <p:nvSpPr>
+          <p:cNvPr id="25" name="Text 23"/>
+          <p:cNvSpPr/>
+          <p:nvPr/>
+        </p:nvSpPr>
+        <p:spPr>
+          <a:xfrm>
+            <a:off x="6519672" y="2752344"/>
+            <a:ext cx="1828800" cy="182880"/>
+          </a:xfrm>
+          <a:prstGeom prst="rect">
+            <a:avLst/>
+          </a:prstGeom>
+          <a:noFill/>
+          <a:ln/>
+        </p:spPr>
+        <p:txBody>
+          <a:bodyPr wrap="square" lIns="0" tIns="0" rIns="0" bIns="0" rtlCol="0" anchor="t"/>
+          <a:lstStyle/>
+          <a:p>
+            <a:pPr algn="ctr" indent="0" marL="0">
+              <a:buNone/>
+            </a:pPr>
+            <a:r>
+              <a:rPr lang="en-US" sz="700" i="1" dirty="0">
+                <a:solidFill>
+                  <a:srgbClr val="94A3B8"/>
+                </a:solidFill>
+                <a:latin typeface="Calibri" pitchFamily="34" charset="0"/>
+                <a:ea typeface="Calibri" pitchFamily="34" charset="-122"/>
+                <a:cs typeface="Calibri" pitchFamily="34" charset="-120"/>
+              </a:rPr>
+              <a:t>'e' dropped before vowel suffix</a:t>
+            </a:r>
+            <a:endParaRPr lang="en-US" sz="700" dirty="0"/>
           </a:p>
         </p:txBody>
       </p:sp>
@@ -9069,7 +9069,7 @@
                 <a:ea typeface="Trebuchet MS" pitchFamily="34" charset="-122"/>
                 <a:cs typeface="Trebuchet MS" pitchFamily="34" charset="-120"/>
               </a:rPr>
-              <a:t>duc</a:t>
+              <a:t>duce</a:t>
             </a:r>
             <a:endParaRPr lang="en-US" sz="1300" dirty="0"/>
           </a:p>
@@ -9116,46 +9116,7 @@
       </p:sp>
       <p:sp>
         <p:nvSpPr>
-          <p:cNvPr id="22" name="Text 20"/>
-          <p:cNvSpPr/>
-          <p:nvPr/>
-        </p:nvSpPr>
-        <p:spPr>
-          <a:xfrm>
-            <a:off x="4370832" y="2752344"/>
-            <a:ext cx="1828800" cy="182880"/>
-          </a:xfrm>
-          <a:prstGeom prst="rect">
-            <a:avLst/>
-          </a:prstGeom>
-          <a:noFill/>
-          <a:ln/>
-        </p:spPr>
-        <p:txBody>
-          <a:bodyPr wrap="square" lIns="0" tIns="0" rIns="0" bIns="0" rtlCol="0" anchor="t"/>
-          <a:lstStyle/>
-          <a:p>
-            <a:pPr algn="ctr" indent="0" marL="0">
-              <a:buNone/>
-            </a:pPr>
-            <a:r>
-              <a:rPr lang="en-US" sz="700" i="1" dirty="0">
-                <a:solidFill>
-                  <a:srgbClr val="94A3B8"/>
-                </a:solidFill>
-                <a:latin typeface="Calibri" pitchFamily="34" charset="0"/>
-                <a:ea typeface="Calibri" pitchFamily="34" charset="-122"/>
-                <a:cs typeface="Calibri" pitchFamily="34" charset="-120"/>
-              </a:rPr>
-              <a:t>'e' dropped from 'reduce' before vowel suffix</a:t>
-            </a:r>
-            <a:endParaRPr lang="en-US" sz="700" dirty="0"/>
-          </a:p>
-        </p:txBody>
-      </p:sp>
-      <p:sp>
-        <p:nvSpPr>
-          <p:cNvPr id="23" name="Shape 21"/>
+          <p:cNvPr id="22" name="Shape 20"/>
           <p:cNvSpPr/>
           <p:nvPr/>
         </p:nvSpPr>
@@ -9189,7 +9150,7 @@
       </p:sp>
       <p:sp>
         <p:nvSpPr>
-          <p:cNvPr id="24" name="Text 22"/>
+          <p:cNvPr id="23" name="Text 21"/>
           <p:cNvSpPr/>
           <p:nvPr/>
         </p:nvSpPr>
@@ -9228,7 +9189,7 @@
       </p:sp>
       <p:sp>
         <p:nvSpPr>
-          <p:cNvPr id="25" name="Text 23"/>
+          <p:cNvPr id="24" name="Text 22"/>
           <p:cNvSpPr/>
           <p:nvPr/>
         </p:nvSpPr>
@@ -9259,9 +9220,48 @@
                 <a:ea typeface="Calibri" pitchFamily="34" charset="-122"/>
                 <a:cs typeface="Calibri" pitchFamily="34" charset="-120"/>
               </a:rPr>
-              <a:t>act or process of</a:t>
+              <a:t>act or result of</a:t>
             </a:r>
             <a:endParaRPr lang="en-US" sz="850" dirty="0"/>
+          </a:p>
+        </p:txBody>
+      </p:sp>
+      <p:sp>
+        <p:nvSpPr>
+          <p:cNvPr id="25" name="Text 23"/>
+          <p:cNvSpPr/>
+          <p:nvPr/>
+        </p:nvSpPr>
+        <p:spPr>
+          <a:xfrm>
+            <a:off x="6519672" y="2752344"/>
+            <a:ext cx="1828800" cy="182880"/>
+          </a:xfrm>
+          <a:prstGeom prst="rect">
+            <a:avLst/>
+          </a:prstGeom>
+          <a:noFill/>
+          <a:ln/>
+        </p:spPr>
+        <p:txBody>
+          <a:bodyPr wrap="square" lIns="0" tIns="0" rIns="0" bIns="0" rtlCol="0" anchor="t"/>
+          <a:lstStyle/>
+          <a:p>
+            <a:pPr algn="ctr" indent="0" marL="0">
+              <a:buNone/>
+            </a:pPr>
+            <a:r>
+              <a:rPr lang="en-US" sz="700" i="1" dirty="0">
+                <a:solidFill>
+                  <a:srgbClr val="94A3B8"/>
+                </a:solidFill>
+                <a:latin typeface="Calibri" pitchFamily="34" charset="0"/>
+                <a:ea typeface="Calibri" pitchFamily="34" charset="-122"/>
+                <a:cs typeface="Calibri" pitchFamily="34" charset="-120"/>
+              </a:rPr>
+              <a:t>'e' dropped before vowel suffix</a:t>
+            </a:r>
+            <a:endParaRPr lang="en-US" sz="700" dirty="0"/>
           </a:p>
         </p:txBody>
       </p:sp>
@@ -10442,7 +10442,7 @@
                 <a:ea typeface="Trebuchet MS" pitchFamily="34" charset="-122"/>
                 <a:cs typeface="Trebuchet MS" pitchFamily="34" charset="-120"/>
               </a:rPr>
-              <a:t>duc</a:t>
+              <a:t>duce</a:t>
             </a:r>
             <a:endParaRPr lang="en-US" sz="1300" dirty="0"/>
           </a:p>
@@ -10489,46 +10489,7 @@
       </p:sp>
       <p:sp>
         <p:nvSpPr>
-          <p:cNvPr id="22" name="Text 20"/>
-          <p:cNvSpPr/>
-          <p:nvPr/>
-        </p:nvSpPr>
-        <p:spPr>
-          <a:xfrm>
-            <a:off x="4370832" y="2752344"/>
-            <a:ext cx="1828800" cy="182880"/>
-          </a:xfrm>
-          <a:prstGeom prst="rect">
-            <a:avLst/>
-          </a:prstGeom>
-          <a:noFill/>
-          <a:ln/>
-        </p:spPr>
-        <p:txBody>
-          <a:bodyPr wrap="square" lIns="0" tIns="0" rIns="0" bIns="0" rtlCol="0" anchor="t"/>
-          <a:lstStyle/>
-          <a:p>
-            <a:pPr algn="ctr" indent="0" marL="0">
-              <a:buNone/>
-            </a:pPr>
-            <a:r>
-              <a:rPr lang="en-US" sz="700" i="1" dirty="0">
-                <a:solidFill>
-                  <a:srgbClr val="94A3B8"/>
-                </a:solidFill>
-                <a:latin typeface="Calibri" pitchFamily="34" charset="0"/>
-                <a:ea typeface="Calibri" pitchFamily="34" charset="-122"/>
-                <a:cs typeface="Calibri" pitchFamily="34" charset="-120"/>
-              </a:rPr>
-              <a:t>'e' dropped from 'reduce' before vowel suffix</a:t>
-            </a:r>
-            <a:endParaRPr lang="en-US" sz="700" dirty="0"/>
-          </a:p>
-        </p:txBody>
-      </p:sp>
-      <p:sp>
-        <p:nvSpPr>
-          <p:cNvPr id="23" name="Shape 21"/>
+          <p:cNvPr id="22" name="Shape 20"/>
           <p:cNvSpPr/>
           <p:nvPr/>
         </p:nvSpPr>
@@ -10562,7 +10523,7 @@
       </p:sp>
       <p:sp>
         <p:nvSpPr>
-          <p:cNvPr id="24" name="Text 22"/>
+          <p:cNvPr id="23" name="Text 21"/>
           <p:cNvSpPr/>
           <p:nvPr/>
         </p:nvSpPr>
@@ -10601,7 +10562,7 @@
       </p:sp>
       <p:sp>
         <p:nvSpPr>
-          <p:cNvPr id="25" name="Text 23"/>
+          <p:cNvPr id="24" name="Text 22"/>
           <p:cNvSpPr/>
           <p:nvPr/>
         </p:nvSpPr>
@@ -10632,9 +10593,48 @@
                 <a:ea typeface="Calibri" pitchFamily="34" charset="-122"/>
                 <a:cs typeface="Calibri" pitchFamily="34" charset="-120"/>
               </a:rPr>
-              <a:t>act or process of</a:t>
+              <a:t>act or result of</a:t>
             </a:r>
             <a:endParaRPr lang="en-US" sz="850" dirty="0"/>
+          </a:p>
+        </p:txBody>
+      </p:sp>
+      <p:sp>
+        <p:nvSpPr>
+          <p:cNvPr id="25" name="Text 23"/>
+          <p:cNvSpPr/>
+          <p:nvPr/>
+        </p:nvSpPr>
+        <p:spPr>
+          <a:xfrm>
+            <a:off x="6519672" y="2752344"/>
+            <a:ext cx="1828800" cy="182880"/>
+          </a:xfrm>
+          <a:prstGeom prst="rect">
+            <a:avLst/>
+          </a:prstGeom>
+          <a:noFill/>
+          <a:ln/>
+        </p:spPr>
+        <p:txBody>
+          <a:bodyPr wrap="square" lIns="0" tIns="0" rIns="0" bIns="0" rtlCol="0" anchor="t"/>
+          <a:lstStyle/>
+          <a:p>
+            <a:pPr algn="ctr" indent="0" marL="0">
+              <a:buNone/>
+            </a:pPr>
+            <a:r>
+              <a:rPr lang="en-US" sz="700" i="1" dirty="0">
+                <a:solidFill>
+                  <a:srgbClr val="94A3B8"/>
+                </a:solidFill>
+                <a:latin typeface="Calibri" pitchFamily="34" charset="0"/>
+                <a:ea typeface="Calibri" pitchFamily="34" charset="-122"/>
+                <a:cs typeface="Calibri" pitchFamily="34" charset="-120"/>
+              </a:rPr>
+              <a:t>'e' dropped before vowel suffix</a:t>
+            </a:r>
+            <a:endParaRPr lang="en-US" sz="700" dirty="0"/>
           </a:p>
         </p:txBody>
       </p:sp>
@@ -13209,7 +13209,7 @@
                 <a:ea typeface="Trebuchet MS" pitchFamily="34" charset="-122"/>
                 <a:cs typeface="Trebuchet MS" pitchFamily="34" charset="-120"/>
               </a:rPr>
-              <a:t>duc</a:t>
+              <a:t>duce</a:t>
             </a:r>
             <a:endParaRPr lang="en-US" sz="1300" dirty="0"/>
           </a:p>
@@ -13256,46 +13256,7 @@
       </p:sp>
       <p:sp>
         <p:nvSpPr>
-          <p:cNvPr id="22" name="Text 20"/>
-          <p:cNvSpPr/>
-          <p:nvPr/>
-        </p:nvSpPr>
-        <p:spPr>
-          <a:xfrm>
-            <a:off x="4370832" y="2752344"/>
-            <a:ext cx="1828800" cy="182880"/>
-          </a:xfrm>
-          <a:prstGeom prst="rect">
-            <a:avLst/>
-          </a:prstGeom>
-          <a:noFill/>
-          <a:ln/>
-        </p:spPr>
-        <p:txBody>
-          <a:bodyPr wrap="square" lIns="0" tIns="0" rIns="0" bIns="0" rtlCol="0" anchor="t"/>
-          <a:lstStyle/>
-          <a:p>
-            <a:pPr algn="ctr" indent="0" marL="0">
-              <a:buNone/>
-            </a:pPr>
-            <a:r>
-              <a:rPr lang="en-US" sz="700" i="1" dirty="0">
-                <a:solidFill>
-                  <a:srgbClr val="94A3B8"/>
-                </a:solidFill>
-                <a:latin typeface="Calibri" pitchFamily="34" charset="0"/>
-                <a:ea typeface="Calibri" pitchFamily="34" charset="-122"/>
-                <a:cs typeface="Calibri" pitchFamily="34" charset="-120"/>
-              </a:rPr>
-              <a:t>'e' dropped from 'reduce' before vowel suffix</a:t>
-            </a:r>
-            <a:endParaRPr lang="en-US" sz="700" dirty="0"/>
-          </a:p>
-        </p:txBody>
-      </p:sp>
-      <p:sp>
-        <p:nvSpPr>
-          <p:cNvPr id="23" name="Shape 21"/>
+          <p:cNvPr id="22" name="Shape 20"/>
           <p:cNvSpPr/>
           <p:nvPr/>
         </p:nvSpPr>
@@ -13329,7 +13290,7 @@
       </p:sp>
       <p:sp>
         <p:nvSpPr>
-          <p:cNvPr id="24" name="Text 22"/>
+          <p:cNvPr id="23" name="Text 21"/>
           <p:cNvSpPr/>
           <p:nvPr/>
         </p:nvSpPr>
@@ -13368,7 +13329,7 @@
       </p:sp>
       <p:sp>
         <p:nvSpPr>
-          <p:cNvPr id="25" name="Text 23"/>
+          <p:cNvPr id="24" name="Text 22"/>
           <p:cNvSpPr/>
           <p:nvPr/>
         </p:nvSpPr>
@@ -13399,9 +13360,48 @@
                 <a:ea typeface="Calibri" pitchFamily="34" charset="-122"/>
                 <a:cs typeface="Calibri" pitchFamily="34" charset="-120"/>
               </a:rPr>
-              <a:t>ongoing action</a:t>
+              <a:t>action happening now</a:t>
             </a:r>
             <a:endParaRPr lang="en-US" sz="850" dirty="0"/>
+          </a:p>
+        </p:txBody>
+      </p:sp>
+      <p:sp>
+        <p:nvSpPr>
+          <p:cNvPr id="25" name="Text 23"/>
+          <p:cNvSpPr/>
+          <p:nvPr/>
+        </p:nvSpPr>
+        <p:spPr>
+          <a:xfrm>
+            <a:off x="6519672" y="2752344"/>
+            <a:ext cx="1828800" cy="182880"/>
+          </a:xfrm>
+          <a:prstGeom prst="rect">
+            <a:avLst/>
+          </a:prstGeom>
+          <a:noFill/>
+          <a:ln/>
+        </p:spPr>
+        <p:txBody>
+          <a:bodyPr wrap="square" lIns="0" tIns="0" rIns="0" bIns="0" rtlCol="0" anchor="t"/>
+          <a:lstStyle/>
+          <a:p>
+            <a:pPr algn="ctr" indent="0" marL="0">
+              <a:buNone/>
+            </a:pPr>
+            <a:r>
+              <a:rPr lang="en-US" sz="700" i="1" dirty="0">
+                <a:solidFill>
+                  <a:srgbClr val="94A3B8"/>
+                </a:solidFill>
+                <a:latin typeface="Calibri" pitchFamily="34" charset="0"/>
+                <a:ea typeface="Calibri" pitchFamily="34" charset="-122"/>
+                <a:cs typeface="Calibri" pitchFamily="34" charset="-120"/>
+              </a:rPr>
+              <a:t>'e' dropped before vowel suffix</a:t>
+            </a:r>
+            <a:endParaRPr lang="en-US" sz="700" dirty="0"/>
           </a:p>
         </p:txBody>
       </p:sp>
@@ -14345,7 +14345,7 @@
                 <a:ea typeface="Trebuchet MS" pitchFamily="34" charset="-122"/>
                 <a:cs typeface="Trebuchet MS" pitchFamily="34" charset="-120"/>
               </a:rPr>
-              <a:t>duc</a:t>
+              <a:t>duce</a:t>
             </a:r>
             <a:endParaRPr lang="en-US" sz="1300" dirty="0"/>
           </a:p>
@@ -14392,46 +14392,7 @@
       </p:sp>
       <p:sp>
         <p:nvSpPr>
-          <p:cNvPr id="22" name="Text 20"/>
-          <p:cNvSpPr/>
-          <p:nvPr/>
-        </p:nvSpPr>
-        <p:spPr>
-          <a:xfrm>
-            <a:off x="4370832" y="2752344"/>
-            <a:ext cx="1828800" cy="182880"/>
-          </a:xfrm>
-          <a:prstGeom prst="rect">
-            <a:avLst/>
-          </a:prstGeom>
-          <a:noFill/>
-          <a:ln/>
-        </p:spPr>
-        <p:txBody>
-          <a:bodyPr wrap="square" lIns="0" tIns="0" rIns="0" bIns="0" rtlCol="0" anchor="t"/>
-          <a:lstStyle/>
-          <a:p>
-            <a:pPr algn="ctr" indent="0" marL="0">
-              <a:buNone/>
-            </a:pPr>
-            <a:r>
-              <a:rPr lang="en-US" sz="700" i="1" dirty="0">
-                <a:solidFill>
-                  <a:srgbClr val="94A3B8"/>
-                </a:solidFill>
-                <a:latin typeface="Calibri" pitchFamily="34" charset="0"/>
-                <a:ea typeface="Calibri" pitchFamily="34" charset="-122"/>
-                <a:cs typeface="Calibri" pitchFamily="34" charset="-120"/>
-              </a:rPr>
-              <a:t>'e' dropped from 'reduce' before vowel suffix</a:t>
-            </a:r>
-            <a:endParaRPr lang="en-US" sz="700" dirty="0"/>
-          </a:p>
-        </p:txBody>
-      </p:sp>
-      <p:sp>
-        <p:nvSpPr>
-          <p:cNvPr id="23" name="Shape 21"/>
+          <p:cNvPr id="22" name="Shape 20"/>
           <p:cNvSpPr/>
           <p:nvPr/>
         </p:nvSpPr>
@@ -14465,7 +14426,7 @@
       </p:sp>
       <p:sp>
         <p:nvSpPr>
-          <p:cNvPr id="24" name="Text 22"/>
+          <p:cNvPr id="23" name="Text 21"/>
           <p:cNvSpPr/>
           <p:nvPr/>
         </p:nvSpPr>
@@ -14504,7 +14465,7 @@
       </p:sp>
       <p:sp>
         <p:nvSpPr>
-          <p:cNvPr id="25" name="Text 23"/>
+          <p:cNvPr id="24" name="Text 22"/>
           <p:cNvSpPr/>
           <p:nvPr/>
         </p:nvSpPr>
@@ -14535,9 +14496,48 @@
                 <a:ea typeface="Calibri" pitchFamily="34" charset="-122"/>
                 <a:cs typeface="Calibri" pitchFamily="34" charset="-120"/>
               </a:rPr>
-              <a:t>ongoing action</a:t>
+              <a:t>action happening now</a:t>
             </a:r>
             <a:endParaRPr lang="en-US" sz="850" dirty="0"/>
+          </a:p>
+        </p:txBody>
+      </p:sp>
+      <p:sp>
+        <p:nvSpPr>
+          <p:cNvPr id="25" name="Text 23"/>
+          <p:cNvSpPr/>
+          <p:nvPr/>
+        </p:nvSpPr>
+        <p:spPr>
+          <a:xfrm>
+            <a:off x="6519672" y="2752344"/>
+            <a:ext cx="1828800" cy="182880"/>
+          </a:xfrm>
+          <a:prstGeom prst="rect">
+            <a:avLst/>
+          </a:prstGeom>
+          <a:noFill/>
+          <a:ln/>
+        </p:spPr>
+        <p:txBody>
+          <a:bodyPr wrap="square" lIns="0" tIns="0" rIns="0" bIns="0" rtlCol="0" anchor="t"/>
+          <a:lstStyle/>
+          <a:p>
+            <a:pPr algn="ctr" indent="0" marL="0">
+              <a:buNone/>
+            </a:pPr>
+            <a:r>
+              <a:rPr lang="en-US" sz="700" i="1" dirty="0">
+                <a:solidFill>
+                  <a:srgbClr val="94A3B8"/>
+                </a:solidFill>
+                <a:latin typeface="Calibri" pitchFamily="34" charset="0"/>
+                <a:ea typeface="Calibri" pitchFamily="34" charset="-122"/>
+                <a:cs typeface="Calibri" pitchFamily="34" charset="-120"/>
+              </a:rPr>
+              <a:t>'e' dropped before vowel suffix</a:t>
+            </a:r>
+            <a:endParaRPr lang="en-US" sz="700" dirty="0"/>
           </a:p>
         </p:txBody>
       </p:sp>
@@ -15983,7 +15983,7 @@
                 <a:ea typeface="Trebuchet MS" pitchFamily="34" charset="-122"/>
                 <a:cs typeface="Trebuchet MS" pitchFamily="34" charset="-120"/>
               </a:rPr>
-              <a:t>duc</a:t>
+              <a:t>duce</a:t>
             </a:r>
             <a:endParaRPr lang="en-US" sz="1300" dirty="0"/>
           </a:p>
@@ -16030,46 +16030,7 @@
       </p:sp>
       <p:sp>
         <p:nvSpPr>
-          <p:cNvPr id="22" name="Text 20"/>
-          <p:cNvSpPr/>
-          <p:nvPr/>
-        </p:nvSpPr>
-        <p:spPr>
-          <a:xfrm>
-            <a:off x="4370832" y="2752344"/>
-            <a:ext cx="1828800" cy="182880"/>
-          </a:xfrm>
-          <a:prstGeom prst="rect">
-            <a:avLst/>
-          </a:prstGeom>
-          <a:noFill/>
-          <a:ln/>
-        </p:spPr>
-        <p:txBody>
-          <a:bodyPr wrap="square" lIns="0" tIns="0" rIns="0" bIns="0" rtlCol="0" anchor="t"/>
-          <a:lstStyle/>
-          <a:p>
-            <a:pPr algn="ctr" indent="0" marL="0">
-              <a:buNone/>
-            </a:pPr>
-            <a:r>
-              <a:rPr lang="en-US" sz="700" i="1" dirty="0">
-                <a:solidFill>
-                  <a:srgbClr val="94A3B8"/>
-                </a:solidFill>
-                <a:latin typeface="Calibri" pitchFamily="34" charset="0"/>
-                <a:ea typeface="Calibri" pitchFamily="34" charset="-122"/>
-                <a:cs typeface="Calibri" pitchFamily="34" charset="-120"/>
-              </a:rPr>
-              <a:t>'e' dropped from 'reduce' before vowel suffix</a:t>
-            </a:r>
-            <a:endParaRPr lang="en-US" sz="700" dirty="0"/>
-          </a:p>
-        </p:txBody>
-      </p:sp>
-      <p:sp>
-        <p:nvSpPr>
-          <p:cNvPr id="23" name="Shape 21"/>
+          <p:cNvPr id="22" name="Shape 20"/>
           <p:cNvSpPr/>
           <p:nvPr/>
         </p:nvSpPr>
@@ -16103,7 +16064,7 @@
       </p:sp>
       <p:sp>
         <p:nvSpPr>
-          <p:cNvPr id="24" name="Text 22"/>
+          <p:cNvPr id="23" name="Text 21"/>
           <p:cNvSpPr/>
           <p:nvPr/>
         </p:nvSpPr>
@@ -16142,7 +16103,7 @@
       </p:sp>
       <p:sp>
         <p:nvSpPr>
-          <p:cNvPr id="25" name="Text 23"/>
+          <p:cNvPr id="24" name="Text 22"/>
           <p:cNvSpPr/>
           <p:nvPr/>
         </p:nvSpPr>
@@ -16173,9 +16134,48 @@
                 <a:ea typeface="Calibri" pitchFamily="34" charset="-122"/>
                 <a:cs typeface="Calibri" pitchFamily="34" charset="-120"/>
               </a:rPr>
-              <a:t>ongoing action</a:t>
+              <a:t>action happening now</a:t>
             </a:r>
             <a:endParaRPr lang="en-US" sz="850" dirty="0"/>
+          </a:p>
+        </p:txBody>
+      </p:sp>
+      <p:sp>
+        <p:nvSpPr>
+          <p:cNvPr id="25" name="Text 23"/>
+          <p:cNvSpPr/>
+          <p:nvPr/>
+        </p:nvSpPr>
+        <p:spPr>
+          <a:xfrm>
+            <a:off x="6519672" y="2752344"/>
+            <a:ext cx="1828800" cy="182880"/>
+          </a:xfrm>
+          <a:prstGeom prst="rect">
+            <a:avLst/>
+          </a:prstGeom>
+          <a:noFill/>
+          <a:ln/>
+        </p:spPr>
+        <p:txBody>
+          <a:bodyPr wrap="square" lIns="0" tIns="0" rIns="0" bIns="0" rtlCol="0" anchor="t"/>
+          <a:lstStyle/>
+          <a:p>
+            <a:pPr algn="ctr" indent="0" marL="0">
+              <a:buNone/>
+            </a:pPr>
+            <a:r>
+              <a:rPr lang="en-US" sz="700" i="1" dirty="0">
+                <a:solidFill>
+                  <a:srgbClr val="94A3B8"/>
+                </a:solidFill>
+                <a:latin typeface="Calibri" pitchFamily="34" charset="0"/>
+                <a:ea typeface="Calibri" pitchFamily="34" charset="-122"/>
+                <a:cs typeface="Calibri" pitchFamily="34" charset="-120"/>
+              </a:rPr>
+              <a:t>'e' dropped before vowel suffix</a:t>
+            </a:r>
+            <a:endParaRPr lang="en-US" sz="700" dirty="0"/>
           </a:p>
         </p:txBody>
       </p:sp>
@@ -16649,7 +16649,7 @@
         </p:nvSpPr>
         <p:spPr>
           <a:xfrm>
-            <a:off x="2124837" y="4169664"/>
+            <a:off x="2254649" y="4169664"/>
             <a:ext cx="685800" cy="384048"/>
           </a:xfrm>
           <a:prstGeom prst="rect">
@@ -16676,7 +16676,7 @@
         </p:nvSpPr>
         <p:spPr>
           <a:xfrm>
-            <a:off x="2124837" y="4169664"/>
+            <a:off x="2254649" y="4169664"/>
             <a:ext cx="685800" cy="384048"/>
           </a:xfrm>
           <a:prstGeom prst="rect">
@@ -16715,7 +16715,7 @@
         </p:nvSpPr>
         <p:spPr>
           <a:xfrm>
-            <a:off x="3033522" y="4169664"/>
+            <a:off x="3293146" y="4169664"/>
             <a:ext cx="685800" cy="384048"/>
           </a:xfrm>
           <a:prstGeom prst="rect">
@@ -16742,7 +16742,7 @@
         </p:nvSpPr>
         <p:spPr>
           <a:xfrm>
-            <a:off x="3033522" y="4169664"/>
+            <a:off x="3293146" y="4169664"/>
             <a:ext cx="685800" cy="384048"/>
           </a:xfrm>
           <a:prstGeom prst="rect">
@@ -16781,7 +16781,7 @@
         </p:nvSpPr>
         <p:spPr>
           <a:xfrm>
-            <a:off x="3942207" y="4169664"/>
+            <a:off x="4331643" y="4169664"/>
             <a:ext cx="685800" cy="384048"/>
           </a:xfrm>
           <a:prstGeom prst="rect">
@@ -16808,7 +16808,7 @@
         </p:nvSpPr>
         <p:spPr>
           <a:xfrm>
-            <a:off x="3942207" y="4169664"/>
+            <a:off x="4331643" y="4169664"/>
             <a:ext cx="685800" cy="384048"/>
           </a:xfrm>
           <a:prstGeom prst="rect">
@@ -16847,7 +16847,7 @@
         </p:nvSpPr>
         <p:spPr>
           <a:xfrm>
-            <a:off x="4850892" y="4169664"/>
+            <a:off x="5370141" y="4169664"/>
             <a:ext cx="685800" cy="384048"/>
           </a:xfrm>
           <a:prstGeom prst="rect">
@@ -16874,7 +16874,7 @@
         </p:nvSpPr>
         <p:spPr>
           <a:xfrm>
-            <a:off x="4850892" y="4169664"/>
+            <a:off x="5370141" y="4169664"/>
             <a:ext cx="685800" cy="384048"/>
           </a:xfrm>
           <a:prstGeom prst="rect">
@@ -16913,7 +16913,7 @@
         </p:nvSpPr>
         <p:spPr>
           <a:xfrm>
-            <a:off x="5759577" y="4169664"/>
+            <a:off x="6408638" y="4169664"/>
             <a:ext cx="685800" cy="384048"/>
           </a:xfrm>
           <a:prstGeom prst="rect">
@@ -16940,7 +16940,7 @@
         </p:nvSpPr>
         <p:spPr>
           <a:xfrm>
-            <a:off x="5759577" y="4169664"/>
+            <a:off x="6408638" y="4169664"/>
             <a:ext cx="685800" cy="384048"/>
           </a:xfrm>
           <a:prstGeom prst="rect">
@@ -16979,7 +16979,7 @@
         </p:nvSpPr>
         <p:spPr>
           <a:xfrm>
-            <a:off x="5759577" y="4572000"/>
+            <a:off x="6408638" y="4572000"/>
             <a:ext cx="685800" cy="219456"/>
           </a:xfrm>
           <a:prstGeom prst="rect">
@@ -17004,7 +17004,7 @@
                 <a:ea typeface="Calibri" pitchFamily="34" charset="-122"/>
                 <a:cs typeface="Calibri" pitchFamily="34" charset="-120"/>
               </a:rPr>
-              <a:t>/k/</a:t>
+              <a:t>/s/</a:t>
             </a:r>
             <a:endParaRPr lang="en-US" sz="750" dirty="0"/>
           </a:p>
@@ -17018,7 +17018,7 @@
         </p:nvSpPr>
         <p:spPr>
           <a:xfrm>
-            <a:off x="6668262" y="4169664"/>
+            <a:off x="7447135" y="4169664"/>
             <a:ext cx="685800" cy="384048"/>
           </a:xfrm>
           <a:prstGeom prst="rect">
@@ -17045,7 +17045,7 @@
         </p:nvSpPr>
         <p:spPr>
           <a:xfrm>
-            <a:off x="6668262" y="4169664"/>
+            <a:off x="7447135" y="4169664"/>
             <a:ext cx="685800" cy="384048"/>
           </a:xfrm>
           <a:prstGeom prst="rect">
@@ -17070,73 +17070,7 @@
                 <a:ea typeface="Trebuchet MS" pitchFamily="34" charset="-122"/>
                 <a:cs typeface="Trebuchet MS" pitchFamily="34" charset="-120"/>
               </a:rPr>
-              <a:t>i</a:t>
-            </a:r>
-            <a:endParaRPr lang="en-US" sz="900" dirty="0"/>
-          </a:p>
-        </p:txBody>
-      </p:sp>
-      <p:sp>
-        <p:nvSpPr>
-          <p:cNvPr id="53" name="Shape 51"/>
-          <p:cNvSpPr/>
-          <p:nvPr/>
-        </p:nvSpPr>
-        <p:spPr>
-          <a:xfrm>
-            <a:off x="7576947" y="4169664"/>
-            <a:ext cx="685800" cy="384048"/>
-          </a:xfrm>
-          <a:prstGeom prst="rect">
-            <a:avLst>
-              <a:gd name="adj" fmla="val 9524"/>
-            </a:avLst>
-          </a:prstGeom>
-          <a:solidFill>
-            <a:srgbClr val="FFFFFF"/>
-          </a:solidFill>
-          <a:ln w="12700">
-            <a:solidFill>
-              <a:srgbClr val="DB2777"/>
-            </a:solidFill>
-            <a:prstDash val="solid"/>
-          </a:ln>
-        </p:spPr>
-      </p:sp>
-      <p:sp>
-        <p:nvSpPr>
-          <p:cNvPr id="54" name="Text 52"/>
-          <p:cNvSpPr/>
-          <p:nvPr/>
-        </p:nvSpPr>
-        <p:spPr>
-          <a:xfrm>
-            <a:off x="7576947" y="4169664"/>
-            <a:ext cx="685800" cy="384048"/>
-          </a:xfrm>
-          <a:prstGeom prst="rect">
-            <a:avLst/>
-          </a:prstGeom>
-          <a:noFill/>
-          <a:ln/>
-        </p:spPr>
-        <p:txBody>
-          <a:bodyPr wrap="square" lIns="0" tIns="0" rIns="0" bIns="0" rtlCol="0" anchor="ctr"/>
-          <a:lstStyle/>
-          <a:p>
-            <a:pPr algn="ctr" indent="0" marL="0">
-              <a:buNone/>
-            </a:pPr>
-            <a:r>
-              <a:rPr lang="en-US" sz="900" b="1" dirty="0">
-                <a:solidFill>
-                  <a:srgbClr val="9D174D"/>
-                </a:solidFill>
-                <a:latin typeface="Trebuchet MS" pitchFamily="34" charset="0"/>
-                <a:ea typeface="Trebuchet MS" pitchFamily="34" charset="-122"/>
-                <a:cs typeface="Trebuchet MS" pitchFamily="34" charset="-120"/>
-              </a:rPr>
-              <a:t>ng</a:t>
+              <a:t>ing</a:t>
             </a:r>
             <a:endParaRPr lang="en-US" sz="900" dirty="0"/>
           </a:p>
@@ -18462,7 +18396,7 @@
                 <a:ea typeface="Calibri" pitchFamily="34" charset="-122"/>
                 <a:cs typeface="Calibri" pitchFamily="34" charset="-120"/>
               </a:rPr>
-              <a:t>Although an </a:t>
+              <a:t>The scientist said the mixture was </a:t>
             </a:r>
             <a:pPr algn="l" indent="0" marL="0">
               <a:buNone/>
@@ -18493,7 +18427,7 @@
                 <a:ea typeface="Calibri" pitchFamily="34" charset="-122"/>
                 <a:cs typeface="Calibri" pitchFamily="34" charset="-120"/>
               </a:rPr>
-              <a:t> problem sounds tricky, a good </a:t>
+              <a:t>, but the </a:t>
             </a:r>
             <a:pPr algn="l" indent="0" marL="0">
               <a:buNone/>
@@ -18524,7 +18458,7 @@
                 <a:ea typeface="Calibri" pitchFamily="34" charset="-122"/>
                 <a:cs typeface="Calibri" pitchFamily="34" charset="-120"/>
               </a:rPr>
-              <a:t> can find a </a:t>
+              <a:t> helped, and </a:t>
             </a:r>
             <a:pPr algn="l" indent="0" marL="0">
               <a:buNone/>
@@ -18541,7 +18475,7 @@
                 <a:ea typeface="Calibri" pitchFamily="34" charset="-122"/>
                 <a:cs typeface="Calibri" pitchFamily="34" charset="-120"/>
               </a:rPr>
-              <a:t>reduction</a:t>
+              <a:t>reduced</a:t>
             </a:r>
             <a:pPr algn="l" indent="0" marL="0">
               <a:buNone/>
@@ -18555,7 +18489,7 @@
                 <a:ea typeface="Calibri" pitchFamily="34" charset="-122"/>
                 <a:cs typeface="Calibri" pitchFamily="34" charset="-120"/>
               </a:rPr>
-              <a:t> in its complexity!</a:t>
+              <a:t> levels of pollution were recorded.</a:t>
             </a:r>
             <a:endParaRPr lang="en-US" sz="1800" dirty="0"/>
           </a:p>
@@ -18966,7 +18900,7 @@
                 <a:ea typeface="Trebuchet MS" pitchFamily="34" charset="-122"/>
                 <a:cs typeface="Trebuchet MS" pitchFamily="34" charset="-120"/>
               </a:rPr>
-              <a:t>reduction</a:t>
+              <a:t>reduced</a:t>
             </a:r>
             <a:endParaRPr lang="en-US" sz="1400" dirty="0"/>
           </a:p>
@@ -20665,7 +20599,7 @@
                 <a:ea typeface="Trebuchet MS" pitchFamily="34" charset="-122"/>
                 <a:cs typeface="Trebuchet MS" pitchFamily="34" charset="-120"/>
               </a:rPr>
-              <a:t>duc</a:t>
+              <a:t>duce</a:t>
             </a:r>
             <a:endParaRPr lang="en-US" sz="1300" dirty="0"/>
           </a:p>
@@ -20712,46 +20646,7 @@
       </p:sp>
       <p:sp>
         <p:nvSpPr>
-          <p:cNvPr id="26" name="Text 24"/>
-          <p:cNvSpPr/>
-          <p:nvPr/>
-        </p:nvSpPr>
-        <p:spPr>
-          <a:xfrm>
-            <a:off x="5329123" y="2752344"/>
-            <a:ext cx="1581912" cy="182880"/>
-          </a:xfrm>
-          <a:prstGeom prst="rect">
-            <a:avLst/>
-          </a:prstGeom>
-          <a:noFill/>
-          <a:ln/>
-        </p:spPr>
-        <p:txBody>
-          <a:bodyPr wrap="square" lIns="0" tIns="0" rIns="0" bIns="0" rtlCol="0" anchor="t"/>
-          <a:lstStyle/>
-          <a:p>
-            <a:pPr algn="ctr" indent="0" marL="0">
-              <a:buNone/>
-            </a:pPr>
-            <a:r>
-              <a:rPr lang="en-US" sz="700" i="1" dirty="0">
-                <a:solidFill>
-                  <a:srgbClr val="94A3B8"/>
-                </a:solidFill>
-                <a:latin typeface="Calibri" pitchFamily="34" charset="0"/>
-                <a:ea typeface="Calibri" pitchFamily="34" charset="-122"/>
-                <a:cs typeface="Calibri" pitchFamily="34" charset="-120"/>
-              </a:rPr>
-              <a:t>'e' dropped from 'reduce' before vowel suffix</a:t>
-            </a:r>
-            <a:endParaRPr lang="en-US" sz="700" dirty="0"/>
-          </a:p>
-        </p:txBody>
-      </p:sp>
-      <p:sp>
-        <p:nvSpPr>
-          <p:cNvPr id="27" name="Shape 25"/>
+          <p:cNvPr id="26" name="Shape 24"/>
           <p:cNvSpPr/>
           <p:nvPr/>
         </p:nvSpPr>
@@ -20785,7 +20680,7 @@
       </p:sp>
       <p:sp>
         <p:nvSpPr>
-          <p:cNvPr id="28" name="Text 26"/>
+          <p:cNvPr id="27" name="Text 25"/>
           <p:cNvSpPr/>
           <p:nvPr/>
         </p:nvSpPr>
@@ -20824,7 +20719,7 @@
       </p:sp>
       <p:sp>
         <p:nvSpPr>
-          <p:cNvPr id="29" name="Text 27"/>
+          <p:cNvPr id="28" name="Text 26"/>
           <p:cNvSpPr/>
           <p:nvPr/>
         </p:nvSpPr>
@@ -20858,6 +20753,45 @@
               <a:t>able to be</a:t>
             </a:r>
             <a:endParaRPr lang="en-US" sz="850" dirty="0"/>
+          </a:p>
+        </p:txBody>
+      </p:sp>
+      <p:sp>
+        <p:nvSpPr>
+          <p:cNvPr id="29" name="Text 27"/>
+          <p:cNvSpPr/>
+          <p:nvPr/>
+        </p:nvSpPr>
+        <p:spPr>
+          <a:xfrm>
+            <a:off x="6998818" y="2752344"/>
+            <a:ext cx="1581912" cy="182880"/>
+          </a:xfrm>
+          <a:prstGeom prst="rect">
+            <a:avLst/>
+          </a:prstGeom>
+          <a:noFill/>
+          <a:ln/>
+        </p:spPr>
+        <p:txBody>
+          <a:bodyPr wrap="square" lIns="0" tIns="0" rIns="0" bIns="0" rtlCol="0" anchor="t"/>
+          <a:lstStyle/>
+          <a:p>
+            <a:pPr algn="ctr" indent="0" marL="0">
+              <a:buNone/>
+            </a:pPr>
+            <a:r>
+              <a:rPr lang="en-US" sz="700" i="1" dirty="0">
+                <a:solidFill>
+                  <a:srgbClr val="94A3B8"/>
+                </a:solidFill>
+                <a:latin typeface="Calibri" pitchFamily="34" charset="0"/>
+                <a:ea typeface="Calibri" pitchFamily="34" charset="-122"/>
+                <a:cs typeface="Calibri" pitchFamily="34" charset="-120"/>
+              </a:rPr>
+              <a:t>'e' dropped before vowel suffix</a:t>
+            </a:r>
+            <a:endParaRPr lang="en-US" sz="700" dirty="0"/>
           </a:p>
         </p:txBody>
       </p:sp>
@@ -21952,7 +21886,7 @@
                 <a:ea typeface="Trebuchet MS" pitchFamily="34" charset="-122"/>
                 <a:cs typeface="Trebuchet MS" pitchFamily="34" charset="-120"/>
               </a:rPr>
-              <a:t>duc</a:t>
+              <a:t>duce</a:t>
             </a:r>
             <a:endParaRPr lang="en-US" sz="1300" dirty="0"/>
           </a:p>
@@ -21999,46 +21933,7 @@
       </p:sp>
       <p:sp>
         <p:nvSpPr>
-          <p:cNvPr id="26" name="Text 24"/>
-          <p:cNvSpPr/>
-          <p:nvPr/>
-        </p:nvSpPr>
-        <p:spPr>
-          <a:xfrm>
-            <a:off x="5329123" y="2752344"/>
-            <a:ext cx="1581912" cy="182880"/>
-          </a:xfrm>
-          <a:prstGeom prst="rect">
-            <a:avLst/>
-          </a:prstGeom>
-          <a:noFill/>
-          <a:ln/>
-        </p:spPr>
-        <p:txBody>
-          <a:bodyPr wrap="square" lIns="0" tIns="0" rIns="0" bIns="0" rtlCol="0" anchor="t"/>
-          <a:lstStyle/>
-          <a:p>
-            <a:pPr algn="ctr" indent="0" marL="0">
-              <a:buNone/>
-            </a:pPr>
-            <a:r>
-              <a:rPr lang="en-US" sz="700" i="1" dirty="0">
-                <a:solidFill>
-                  <a:srgbClr val="94A3B8"/>
-                </a:solidFill>
-                <a:latin typeface="Calibri" pitchFamily="34" charset="0"/>
-                <a:ea typeface="Calibri" pitchFamily="34" charset="-122"/>
-                <a:cs typeface="Calibri" pitchFamily="34" charset="-120"/>
-              </a:rPr>
-              <a:t>'e' dropped from 'reduce' before vowel suffix</a:t>
-            </a:r>
-            <a:endParaRPr lang="en-US" sz="700" dirty="0"/>
-          </a:p>
-        </p:txBody>
-      </p:sp>
-      <p:sp>
-        <p:nvSpPr>
-          <p:cNvPr id="27" name="Shape 25"/>
+          <p:cNvPr id="26" name="Shape 24"/>
           <p:cNvSpPr/>
           <p:nvPr/>
         </p:nvSpPr>
@@ -22072,7 +21967,7 @@
       </p:sp>
       <p:sp>
         <p:nvSpPr>
-          <p:cNvPr id="28" name="Text 26"/>
+          <p:cNvPr id="27" name="Text 25"/>
           <p:cNvSpPr/>
           <p:nvPr/>
         </p:nvSpPr>
@@ -22111,7 +22006,7 @@
       </p:sp>
       <p:sp>
         <p:nvSpPr>
-          <p:cNvPr id="29" name="Text 27"/>
+          <p:cNvPr id="28" name="Text 26"/>
           <p:cNvSpPr/>
           <p:nvPr/>
         </p:nvSpPr>
@@ -22145,6 +22040,45 @@
               <a:t>able to be</a:t>
             </a:r>
             <a:endParaRPr lang="en-US" sz="850" dirty="0"/>
+          </a:p>
+        </p:txBody>
+      </p:sp>
+      <p:sp>
+        <p:nvSpPr>
+          <p:cNvPr id="29" name="Text 27"/>
+          <p:cNvSpPr/>
+          <p:nvPr/>
+        </p:nvSpPr>
+        <p:spPr>
+          <a:xfrm>
+            <a:off x="6998818" y="2752344"/>
+            <a:ext cx="1581912" cy="182880"/>
+          </a:xfrm>
+          <a:prstGeom prst="rect">
+            <a:avLst/>
+          </a:prstGeom>
+          <a:noFill/>
+          <a:ln/>
+        </p:spPr>
+        <p:txBody>
+          <a:bodyPr wrap="square" lIns="0" tIns="0" rIns="0" bIns="0" rtlCol="0" anchor="t"/>
+          <a:lstStyle/>
+          <a:p>
+            <a:pPr algn="ctr" indent="0" marL="0">
+              <a:buNone/>
+            </a:pPr>
+            <a:r>
+              <a:rPr lang="en-US" sz="700" i="1" dirty="0">
+                <a:solidFill>
+                  <a:srgbClr val="94A3B8"/>
+                </a:solidFill>
+                <a:latin typeface="Calibri" pitchFamily="34" charset="0"/>
+                <a:ea typeface="Calibri" pitchFamily="34" charset="-122"/>
+                <a:cs typeface="Calibri" pitchFamily="34" charset="-120"/>
+              </a:rPr>
+              <a:t>'e' dropped before vowel suffix</a:t>
+            </a:r>
+            <a:endParaRPr lang="en-US" sz="700" dirty="0"/>
           </a:p>
         </p:txBody>
       </p:sp>
@@ -23686,7 +23620,7 @@
                 <a:ea typeface="Trebuchet MS" pitchFamily="34" charset="-122"/>
                 <a:cs typeface="Trebuchet MS" pitchFamily="34" charset="-120"/>
               </a:rPr>
-              <a:t>duc</a:t>
+              <a:t>duce</a:t>
             </a:r>
             <a:endParaRPr lang="en-US" sz="1300" dirty="0"/>
           </a:p>
@@ -23733,46 +23667,7 @@
       </p:sp>
       <p:sp>
         <p:nvSpPr>
-          <p:cNvPr id="26" name="Text 24"/>
-          <p:cNvSpPr/>
-          <p:nvPr/>
-        </p:nvSpPr>
-        <p:spPr>
-          <a:xfrm>
-            <a:off x="5329123" y="2752344"/>
-            <a:ext cx="1581912" cy="182880"/>
-          </a:xfrm>
-          <a:prstGeom prst="rect">
-            <a:avLst/>
-          </a:prstGeom>
-          <a:noFill/>
-          <a:ln/>
-        </p:spPr>
-        <p:txBody>
-          <a:bodyPr wrap="square" lIns="0" tIns="0" rIns="0" bIns="0" rtlCol="0" anchor="t"/>
-          <a:lstStyle/>
-          <a:p>
-            <a:pPr algn="ctr" indent="0" marL="0">
-              <a:buNone/>
-            </a:pPr>
-            <a:r>
-              <a:rPr lang="en-US" sz="700" i="1" dirty="0">
-                <a:solidFill>
-                  <a:srgbClr val="94A3B8"/>
-                </a:solidFill>
-                <a:latin typeface="Calibri" pitchFamily="34" charset="0"/>
-                <a:ea typeface="Calibri" pitchFamily="34" charset="-122"/>
-                <a:cs typeface="Calibri" pitchFamily="34" charset="-120"/>
-              </a:rPr>
-              <a:t>'e' dropped from 'reduce' before vowel suffix</a:t>
-            </a:r>
-            <a:endParaRPr lang="en-US" sz="700" dirty="0"/>
-          </a:p>
-        </p:txBody>
-      </p:sp>
-      <p:sp>
-        <p:nvSpPr>
-          <p:cNvPr id="27" name="Shape 25"/>
+          <p:cNvPr id="26" name="Shape 24"/>
           <p:cNvSpPr/>
           <p:nvPr/>
         </p:nvSpPr>
@@ -23806,7 +23701,7 @@
       </p:sp>
       <p:sp>
         <p:nvSpPr>
-          <p:cNvPr id="28" name="Text 26"/>
+          <p:cNvPr id="27" name="Text 25"/>
           <p:cNvSpPr/>
           <p:nvPr/>
         </p:nvSpPr>
@@ -23845,7 +23740,7 @@
       </p:sp>
       <p:sp>
         <p:nvSpPr>
-          <p:cNvPr id="29" name="Text 27"/>
+          <p:cNvPr id="28" name="Text 26"/>
           <p:cNvSpPr/>
           <p:nvPr/>
         </p:nvSpPr>
@@ -23884,6 +23779,45 @@
       </p:sp>
       <p:sp>
         <p:nvSpPr>
+          <p:cNvPr id="29" name="Text 27"/>
+          <p:cNvSpPr/>
+          <p:nvPr/>
+        </p:nvSpPr>
+        <p:spPr>
+          <a:xfrm>
+            <a:off x="6998818" y="2752344"/>
+            <a:ext cx="1581912" cy="182880"/>
+          </a:xfrm>
+          <a:prstGeom prst="rect">
+            <a:avLst/>
+          </a:prstGeom>
+          <a:noFill/>
+          <a:ln/>
+        </p:spPr>
+        <p:txBody>
+          <a:bodyPr wrap="square" lIns="0" tIns="0" rIns="0" bIns="0" rtlCol="0" anchor="t"/>
+          <a:lstStyle/>
+          <a:p>
+            <a:pPr algn="ctr" indent="0" marL="0">
+              <a:buNone/>
+            </a:pPr>
+            <a:r>
+              <a:rPr lang="en-US" sz="700" i="1" dirty="0">
+                <a:solidFill>
+                  <a:srgbClr val="94A3B8"/>
+                </a:solidFill>
+                <a:latin typeface="Calibri" pitchFamily="34" charset="0"/>
+                <a:ea typeface="Calibri" pitchFamily="34" charset="-122"/>
+                <a:cs typeface="Calibri" pitchFamily="34" charset="-120"/>
+              </a:rPr>
+              <a:t>'e' dropped before vowel suffix</a:t>
+            </a:r>
+            <a:endParaRPr lang="en-US" sz="700" dirty="0"/>
+          </a:p>
+        </p:txBody>
+      </p:sp>
+      <p:sp>
+        <p:nvSpPr>
           <p:cNvPr id="30" name="Shape 28"/>
           <p:cNvSpPr/>
           <p:nvPr/>
@@ -24983,7 +24917,7 @@
                 <a:ea typeface="Calibri" pitchFamily="34" charset="-122"/>
                 <a:cs typeface="Calibri" pitchFamily="34" charset="-120"/>
               </a:rPr>
-              <a:t>/k/</a:t>
+              <a:t>/s/</a:t>
             </a:r>
             <a:endParaRPr lang="en-US" sz="750" dirty="0"/>
           </a:p>
@@ -26690,7 +26624,7 @@
                 <a:ea typeface="Trebuchet MS" pitchFamily="34" charset="-122"/>
                 <a:cs typeface="Trebuchet MS" pitchFamily="34" charset="-120"/>
               </a:rPr>
-              <a:t>duc</a:t>
+              <a:t>duce</a:t>
             </a:r>
             <a:endParaRPr lang="en-US" sz="1300" dirty="0"/>
           </a:p>
@@ -26737,46 +26671,7 @@
       </p:sp>
       <p:sp>
         <p:nvSpPr>
-          <p:cNvPr id="22" name="Text 20"/>
-          <p:cNvSpPr/>
-          <p:nvPr/>
-        </p:nvSpPr>
-        <p:spPr>
-          <a:xfrm>
-            <a:off x="4370832" y="2752344"/>
-            <a:ext cx="1828800" cy="182880"/>
-          </a:xfrm>
-          <a:prstGeom prst="rect">
-            <a:avLst/>
-          </a:prstGeom>
-          <a:noFill/>
-          <a:ln/>
-        </p:spPr>
-        <p:txBody>
-          <a:bodyPr wrap="square" lIns="0" tIns="0" rIns="0" bIns="0" rtlCol="0" anchor="t"/>
-          <a:lstStyle/>
-          <a:p>
-            <a:pPr algn="ctr" indent="0" marL="0">
-              <a:buNone/>
-            </a:pPr>
-            <a:r>
-              <a:rPr lang="en-US" sz="700" i="1" dirty="0">
-                <a:solidFill>
-                  <a:srgbClr val="94A3B8"/>
-                </a:solidFill>
-                <a:latin typeface="Calibri" pitchFamily="34" charset="0"/>
-                <a:ea typeface="Calibri" pitchFamily="34" charset="-122"/>
-                <a:cs typeface="Calibri" pitchFamily="34" charset="-120"/>
-              </a:rPr>
-              <a:t>'e' dropped from 'reduce' before vowel suffix</a:t>
-            </a:r>
-            <a:endParaRPr lang="en-US" sz="700" dirty="0"/>
-          </a:p>
-        </p:txBody>
-      </p:sp>
-      <p:sp>
-        <p:nvSpPr>
-          <p:cNvPr id="23" name="Shape 21"/>
+          <p:cNvPr id="22" name="Shape 20"/>
           <p:cNvSpPr/>
           <p:nvPr/>
         </p:nvSpPr>
@@ -26810,7 +26705,7 @@
       </p:sp>
       <p:sp>
         <p:nvSpPr>
-          <p:cNvPr id="24" name="Text 22"/>
+          <p:cNvPr id="23" name="Text 21"/>
           <p:cNvSpPr/>
           <p:nvPr/>
         </p:nvSpPr>
@@ -26849,7 +26744,7 @@
       </p:sp>
       <p:sp>
         <p:nvSpPr>
-          <p:cNvPr id="25" name="Text 23"/>
+          <p:cNvPr id="24" name="Text 22"/>
           <p:cNvSpPr/>
           <p:nvPr/>
         </p:nvSpPr>
@@ -26880,9 +26775,48 @@
                 <a:ea typeface="Calibri" pitchFamily="34" charset="-122"/>
                 <a:cs typeface="Calibri" pitchFamily="34" charset="-120"/>
               </a:rPr>
-              <a:t>one who does</a:t>
+              <a:t>person or thing that does</a:t>
             </a:r>
             <a:endParaRPr lang="en-US" sz="850" dirty="0"/>
+          </a:p>
+        </p:txBody>
+      </p:sp>
+      <p:sp>
+        <p:nvSpPr>
+          <p:cNvPr id="25" name="Text 23"/>
+          <p:cNvSpPr/>
+          <p:nvPr/>
+        </p:nvSpPr>
+        <p:spPr>
+          <a:xfrm>
+            <a:off x="6519672" y="2752344"/>
+            <a:ext cx="1828800" cy="182880"/>
+          </a:xfrm>
+          <a:prstGeom prst="rect">
+            <a:avLst/>
+          </a:prstGeom>
+          <a:noFill/>
+          <a:ln/>
+        </p:spPr>
+        <p:txBody>
+          <a:bodyPr wrap="square" lIns="0" tIns="0" rIns="0" bIns="0" rtlCol="0" anchor="t"/>
+          <a:lstStyle/>
+          <a:p>
+            <a:pPr algn="ctr" indent="0" marL="0">
+              <a:buNone/>
+            </a:pPr>
+            <a:r>
+              <a:rPr lang="en-US" sz="700" i="1" dirty="0">
+                <a:solidFill>
+                  <a:srgbClr val="94A3B8"/>
+                </a:solidFill>
+                <a:latin typeface="Calibri" pitchFamily="34" charset="0"/>
+                <a:ea typeface="Calibri" pitchFamily="34" charset="-122"/>
+                <a:cs typeface="Calibri" pitchFamily="34" charset="-120"/>
+              </a:rPr>
+              <a:t>'e' dropped before vowel suffix</a:t>
+            </a:r>
+            <a:endParaRPr lang="en-US" sz="700" dirty="0"/>
           </a:p>
         </p:txBody>
       </p:sp>
@@ -28545,7 +28479,7 @@
                 <a:ea typeface="Trebuchet MS" pitchFamily="34" charset="-122"/>
                 <a:cs typeface="Trebuchet MS" pitchFamily="34" charset="-120"/>
               </a:rPr>
-              <a:t>duc</a:t>
+              <a:t>duce</a:t>
             </a:r>
             <a:endParaRPr lang="en-US" sz="1300" dirty="0"/>
           </a:p>
@@ -28592,46 +28526,7 @@
       </p:sp>
       <p:sp>
         <p:nvSpPr>
-          <p:cNvPr id="22" name="Text 20"/>
-          <p:cNvSpPr/>
-          <p:nvPr/>
-        </p:nvSpPr>
-        <p:spPr>
-          <a:xfrm>
-            <a:off x="4370832" y="2752344"/>
-            <a:ext cx="1828800" cy="182880"/>
-          </a:xfrm>
-          <a:prstGeom prst="rect">
-            <a:avLst/>
-          </a:prstGeom>
-          <a:noFill/>
-          <a:ln/>
-        </p:spPr>
-        <p:txBody>
-          <a:bodyPr wrap="square" lIns="0" tIns="0" rIns="0" bIns="0" rtlCol="0" anchor="t"/>
-          <a:lstStyle/>
-          <a:p>
-            <a:pPr algn="ctr" indent="0" marL="0">
-              <a:buNone/>
-            </a:pPr>
-            <a:r>
-              <a:rPr lang="en-US" sz="700" i="1" dirty="0">
-                <a:solidFill>
-                  <a:srgbClr val="94A3B8"/>
-                </a:solidFill>
-                <a:latin typeface="Calibri" pitchFamily="34" charset="0"/>
-                <a:ea typeface="Calibri" pitchFamily="34" charset="-122"/>
-                <a:cs typeface="Calibri" pitchFamily="34" charset="-120"/>
-              </a:rPr>
-              <a:t>'e' dropped from 'reduce' before vowel suffix</a:t>
-            </a:r>
-            <a:endParaRPr lang="en-US" sz="700" dirty="0"/>
-          </a:p>
-        </p:txBody>
-      </p:sp>
-      <p:sp>
-        <p:nvSpPr>
-          <p:cNvPr id="23" name="Shape 21"/>
+          <p:cNvPr id="22" name="Shape 20"/>
           <p:cNvSpPr/>
           <p:nvPr/>
         </p:nvSpPr>
@@ -28665,7 +28560,7 @@
       </p:sp>
       <p:sp>
         <p:nvSpPr>
-          <p:cNvPr id="24" name="Text 22"/>
+          <p:cNvPr id="23" name="Text 21"/>
           <p:cNvSpPr/>
           <p:nvPr/>
         </p:nvSpPr>
@@ -28704,7 +28599,7 @@
       </p:sp>
       <p:sp>
         <p:nvSpPr>
-          <p:cNvPr id="25" name="Text 23"/>
+          <p:cNvPr id="24" name="Text 22"/>
           <p:cNvSpPr/>
           <p:nvPr/>
         </p:nvSpPr>
@@ -28735,9 +28630,48 @@
                 <a:ea typeface="Calibri" pitchFamily="34" charset="-122"/>
                 <a:cs typeface="Calibri" pitchFamily="34" charset="-120"/>
               </a:rPr>
-              <a:t>one who does</a:t>
+              <a:t>person or thing that does</a:t>
             </a:r>
             <a:endParaRPr lang="en-US" sz="850" dirty="0"/>
+          </a:p>
+        </p:txBody>
+      </p:sp>
+      <p:sp>
+        <p:nvSpPr>
+          <p:cNvPr id="25" name="Text 23"/>
+          <p:cNvSpPr/>
+          <p:nvPr/>
+        </p:nvSpPr>
+        <p:spPr>
+          <a:xfrm>
+            <a:off x="6519672" y="2752344"/>
+            <a:ext cx="1828800" cy="182880"/>
+          </a:xfrm>
+          <a:prstGeom prst="rect">
+            <a:avLst/>
+          </a:prstGeom>
+          <a:noFill/>
+          <a:ln/>
+        </p:spPr>
+        <p:txBody>
+          <a:bodyPr wrap="square" lIns="0" tIns="0" rIns="0" bIns="0" rtlCol="0" anchor="t"/>
+          <a:lstStyle/>
+          <a:p>
+            <a:pPr algn="ctr" indent="0" marL="0">
+              <a:buNone/>
+            </a:pPr>
+            <a:r>
+              <a:rPr lang="en-US" sz="700" i="1" dirty="0">
+                <a:solidFill>
+                  <a:srgbClr val="94A3B8"/>
+                </a:solidFill>
+                <a:latin typeface="Calibri" pitchFamily="34" charset="0"/>
+                <a:ea typeface="Calibri" pitchFamily="34" charset="-122"/>
+                <a:cs typeface="Calibri" pitchFamily="34" charset="-120"/>
+              </a:rPr>
+              <a:t>'e' dropped before vowel suffix</a:t>
+            </a:r>
+            <a:endParaRPr lang="en-US" sz="700" dirty="0"/>
           </a:p>
         </p:txBody>
       </p:sp>
@@ -29918,7 +29852,7 @@
                 <a:ea typeface="Trebuchet MS" pitchFamily="34" charset="-122"/>
                 <a:cs typeface="Trebuchet MS" pitchFamily="34" charset="-120"/>
               </a:rPr>
-              <a:t>duc</a:t>
+              <a:t>duce</a:t>
             </a:r>
             <a:endParaRPr lang="en-US" sz="1300" dirty="0"/>
           </a:p>
@@ -29965,46 +29899,7 @@
       </p:sp>
       <p:sp>
         <p:nvSpPr>
-          <p:cNvPr id="22" name="Text 20"/>
-          <p:cNvSpPr/>
-          <p:nvPr/>
-        </p:nvSpPr>
-        <p:spPr>
-          <a:xfrm>
-            <a:off x="4370832" y="2752344"/>
-            <a:ext cx="1828800" cy="182880"/>
-          </a:xfrm>
-          <a:prstGeom prst="rect">
-            <a:avLst/>
-          </a:prstGeom>
-          <a:noFill/>
-          <a:ln/>
-        </p:spPr>
-        <p:txBody>
-          <a:bodyPr wrap="square" lIns="0" tIns="0" rIns="0" bIns="0" rtlCol="0" anchor="t"/>
-          <a:lstStyle/>
-          <a:p>
-            <a:pPr algn="ctr" indent="0" marL="0">
-              <a:buNone/>
-            </a:pPr>
-            <a:r>
-              <a:rPr lang="en-US" sz="700" i="1" dirty="0">
-                <a:solidFill>
-                  <a:srgbClr val="94A3B8"/>
-                </a:solidFill>
-                <a:latin typeface="Calibri" pitchFamily="34" charset="0"/>
-                <a:ea typeface="Calibri" pitchFamily="34" charset="-122"/>
-                <a:cs typeface="Calibri" pitchFamily="34" charset="-120"/>
-              </a:rPr>
-              <a:t>'e' dropped from 'reduce' before vowel suffix</a:t>
-            </a:r>
-            <a:endParaRPr lang="en-US" sz="700" dirty="0"/>
-          </a:p>
-        </p:txBody>
-      </p:sp>
-      <p:sp>
-        <p:nvSpPr>
-          <p:cNvPr id="23" name="Shape 21"/>
+          <p:cNvPr id="22" name="Shape 20"/>
           <p:cNvSpPr/>
           <p:nvPr/>
         </p:nvSpPr>
@@ -30038,7 +29933,7 @@
       </p:sp>
       <p:sp>
         <p:nvSpPr>
-          <p:cNvPr id="24" name="Text 22"/>
+          <p:cNvPr id="23" name="Text 21"/>
           <p:cNvSpPr/>
           <p:nvPr/>
         </p:nvSpPr>
@@ -30077,7 +29972,7 @@
       </p:sp>
       <p:sp>
         <p:nvSpPr>
-          <p:cNvPr id="25" name="Text 23"/>
+          <p:cNvPr id="24" name="Text 22"/>
           <p:cNvSpPr/>
           <p:nvPr/>
         </p:nvSpPr>
@@ -30108,9 +30003,48 @@
                 <a:ea typeface="Calibri" pitchFamily="34" charset="-122"/>
                 <a:cs typeface="Calibri" pitchFamily="34" charset="-120"/>
               </a:rPr>
-              <a:t>one who does</a:t>
+              <a:t>person or thing that does</a:t>
             </a:r>
             <a:endParaRPr lang="en-US" sz="850" dirty="0"/>
+          </a:p>
+        </p:txBody>
+      </p:sp>
+      <p:sp>
+        <p:nvSpPr>
+          <p:cNvPr id="25" name="Text 23"/>
+          <p:cNvSpPr/>
+          <p:nvPr/>
+        </p:nvSpPr>
+        <p:spPr>
+          <a:xfrm>
+            <a:off x="6519672" y="2752344"/>
+            <a:ext cx="1828800" cy="182880"/>
+          </a:xfrm>
+          <a:prstGeom prst="rect">
+            <a:avLst/>
+          </a:prstGeom>
+          <a:noFill/>
+          <a:ln/>
+        </p:spPr>
+        <p:txBody>
+          <a:bodyPr wrap="square" lIns="0" tIns="0" rIns="0" bIns="0" rtlCol="0" anchor="t"/>
+          <a:lstStyle/>
+          <a:p>
+            <a:pPr algn="ctr" indent="0" marL="0">
+              <a:buNone/>
+            </a:pPr>
+            <a:r>
+              <a:rPr lang="en-US" sz="700" i="1" dirty="0">
+                <a:solidFill>
+                  <a:srgbClr val="94A3B8"/>
+                </a:solidFill>
+                <a:latin typeface="Calibri" pitchFamily="34" charset="0"/>
+                <a:ea typeface="Calibri" pitchFamily="34" charset="-122"/>
+                <a:cs typeface="Calibri" pitchFamily="34" charset="-120"/>
+              </a:rPr>
+              <a:t>'e' dropped before vowel suffix</a:t>
+            </a:r>
+            <a:endParaRPr lang="en-US" sz="700" dirty="0"/>
           </a:p>
         </p:txBody>
       </p:sp>
@@ -30939,7 +30873,7 @@
                 <a:ea typeface="Calibri" pitchFamily="34" charset="-122"/>
                 <a:cs typeface="Calibri" pitchFamily="34" charset="-120"/>
               </a:rPr>
-              <a:t>/k/</a:t>
+              <a:t>/s/</a:t>
             </a:r>
             <a:endParaRPr lang="en-US" sz="750" dirty="0"/>
           </a:p>
@@ -31436,7 +31370,7 @@
                 <a:ea typeface="Trebuchet MS" pitchFamily="34" charset="-122"/>
                 <a:cs typeface="Trebuchet MS" pitchFamily="34" charset="-120"/>
               </a:rPr>
-              <a:t>reduction</a:t>
+              <a:t>reduced</a:t>
             </a:r>
             <a:endParaRPr lang="en-US" sz="2800" dirty="0"/>
           </a:p>
@@ -32263,7 +32197,7 @@
                 <a:ea typeface="Trebuchet MS" pitchFamily="34" charset="-122"/>
                 <a:cs typeface="Trebuchet MS" pitchFamily="34" charset="-120"/>
               </a:rPr>
-              <a:t>reduction</a:t>
+              <a:t>reduced</a:t>
             </a:r>
             <a:endParaRPr lang="en-US" sz="2800" dirty="0"/>
           </a:p>
@@ -32514,7 +32448,7 @@
                 <a:ea typeface="Trebuchet MS" pitchFamily="34" charset="-122"/>
                 <a:cs typeface="Trebuchet MS" pitchFamily="34" charset="-120"/>
               </a:rPr>
-              <a:t>duc</a:t>
+              <a:t>duce</a:t>
             </a:r>
             <a:endParaRPr lang="en-US" sz="1300" dirty="0"/>
           </a:p>
@@ -32561,46 +32495,7 @@
       </p:sp>
       <p:sp>
         <p:nvSpPr>
-          <p:cNvPr id="22" name="Text 20"/>
-          <p:cNvSpPr/>
-          <p:nvPr/>
-        </p:nvSpPr>
-        <p:spPr>
-          <a:xfrm>
-            <a:off x="4370832" y="2752344"/>
-            <a:ext cx="1828800" cy="182880"/>
-          </a:xfrm>
-          <a:prstGeom prst="rect">
-            <a:avLst/>
-          </a:prstGeom>
-          <a:noFill/>
-          <a:ln/>
-        </p:spPr>
-        <p:txBody>
-          <a:bodyPr wrap="square" lIns="0" tIns="0" rIns="0" bIns="0" rtlCol="0" anchor="t"/>
-          <a:lstStyle/>
-          <a:p>
-            <a:pPr algn="ctr" indent="0" marL="0">
-              <a:buNone/>
-            </a:pPr>
-            <a:r>
-              <a:rPr lang="en-US" sz="700" i="1" dirty="0">
-                <a:solidFill>
-                  <a:srgbClr val="94A3B8"/>
-                </a:solidFill>
-                <a:latin typeface="Calibri" pitchFamily="34" charset="0"/>
-                <a:ea typeface="Calibri" pitchFamily="34" charset="-122"/>
-                <a:cs typeface="Calibri" pitchFamily="34" charset="-120"/>
-              </a:rPr>
-              <a:t>'e' dropped from 'reduce' before vowel suffix</a:t>
-            </a:r>
-            <a:endParaRPr lang="en-US" sz="700" dirty="0"/>
-          </a:p>
-        </p:txBody>
-      </p:sp>
-      <p:sp>
-        <p:nvSpPr>
-          <p:cNvPr id="23" name="Shape 21"/>
+          <p:cNvPr id="22" name="Shape 20"/>
           <p:cNvSpPr/>
           <p:nvPr/>
         </p:nvSpPr>
@@ -32634,7 +32529,7 @@
       </p:sp>
       <p:sp>
         <p:nvSpPr>
-          <p:cNvPr id="24" name="Text 22"/>
+          <p:cNvPr id="23" name="Text 21"/>
           <p:cNvSpPr/>
           <p:nvPr/>
         </p:nvSpPr>
@@ -32665,7 +32560,7 @@
                 <a:ea typeface="Trebuchet MS" pitchFamily="34" charset="-122"/>
                 <a:cs typeface="Trebuchet MS" pitchFamily="34" charset="-120"/>
               </a:rPr>
-              <a:t>tion</a:t>
+              <a:t>ed</a:t>
             </a:r>
             <a:endParaRPr lang="en-US" sz="1300" dirty="0"/>
           </a:p>
@@ -32673,7 +32568,7 @@
       </p:sp>
       <p:sp>
         <p:nvSpPr>
-          <p:cNvPr id="25" name="Text 23"/>
+          <p:cNvPr id="24" name="Text 22"/>
           <p:cNvSpPr/>
           <p:nvPr/>
         </p:nvSpPr>
@@ -32704,9 +32599,48 @@
                 <a:ea typeface="Calibri" pitchFamily="34" charset="-122"/>
                 <a:cs typeface="Calibri" pitchFamily="34" charset="-120"/>
               </a:rPr>
-              <a:t>act or process of</a:t>
+              <a:t>past tense</a:t>
             </a:r>
             <a:endParaRPr lang="en-US" sz="850" dirty="0"/>
+          </a:p>
+        </p:txBody>
+      </p:sp>
+      <p:sp>
+        <p:nvSpPr>
+          <p:cNvPr id="25" name="Text 23"/>
+          <p:cNvSpPr/>
+          <p:nvPr/>
+        </p:nvSpPr>
+        <p:spPr>
+          <a:xfrm>
+            <a:off x="6519672" y="2752344"/>
+            <a:ext cx="1828800" cy="182880"/>
+          </a:xfrm>
+          <a:prstGeom prst="rect">
+            <a:avLst/>
+          </a:prstGeom>
+          <a:noFill/>
+          <a:ln/>
+        </p:spPr>
+        <p:txBody>
+          <a:bodyPr wrap="square" lIns="0" tIns="0" rIns="0" bIns="0" rtlCol="0" anchor="t"/>
+          <a:lstStyle/>
+          <a:p>
+            <a:pPr algn="ctr" indent="0" marL="0">
+              <a:buNone/>
+            </a:pPr>
+            <a:r>
+              <a:rPr lang="en-US" sz="700" i="1" dirty="0">
+                <a:solidFill>
+                  <a:srgbClr val="94A3B8"/>
+                </a:solidFill>
+                <a:latin typeface="Calibri" pitchFamily="34" charset="0"/>
+                <a:ea typeface="Calibri" pitchFamily="34" charset="-122"/>
+                <a:cs typeface="Calibri" pitchFamily="34" charset="-120"/>
+              </a:rPr>
+              <a:t>'e' dropped before vowel suffix</a:t>
+            </a:r>
+            <a:endParaRPr lang="en-US" sz="700" dirty="0"/>
           </a:p>
         </p:txBody>
       </p:sp>
@@ -33399,7 +33333,7 @@
                 <a:ea typeface="Trebuchet MS" pitchFamily="34" charset="-122"/>
                 <a:cs typeface="Trebuchet MS" pitchFamily="34" charset="-120"/>
               </a:rPr>
-              <a:t>reduction</a:t>
+              <a:t>reduced</a:t>
             </a:r>
             <a:endParaRPr lang="en-US" sz="2800" dirty="0"/>
           </a:p>
@@ -33650,7 +33584,7 @@
                 <a:ea typeface="Trebuchet MS" pitchFamily="34" charset="-122"/>
                 <a:cs typeface="Trebuchet MS" pitchFamily="34" charset="-120"/>
               </a:rPr>
-              <a:t>duc</a:t>
+              <a:t>duce</a:t>
             </a:r>
             <a:endParaRPr lang="en-US" sz="1300" dirty="0"/>
           </a:p>
@@ -33697,46 +33631,7 @@
       </p:sp>
       <p:sp>
         <p:nvSpPr>
-          <p:cNvPr id="22" name="Text 20"/>
-          <p:cNvSpPr/>
-          <p:nvPr/>
-        </p:nvSpPr>
-        <p:spPr>
-          <a:xfrm>
-            <a:off x="4370832" y="2752344"/>
-            <a:ext cx="1828800" cy="182880"/>
-          </a:xfrm>
-          <a:prstGeom prst="rect">
-            <a:avLst/>
-          </a:prstGeom>
-          <a:noFill/>
-          <a:ln/>
-        </p:spPr>
-        <p:txBody>
-          <a:bodyPr wrap="square" lIns="0" tIns="0" rIns="0" bIns="0" rtlCol="0" anchor="t"/>
-          <a:lstStyle/>
-          <a:p>
-            <a:pPr algn="ctr" indent="0" marL="0">
-              <a:buNone/>
-            </a:pPr>
-            <a:r>
-              <a:rPr lang="en-US" sz="700" i="1" dirty="0">
-                <a:solidFill>
-                  <a:srgbClr val="94A3B8"/>
-                </a:solidFill>
-                <a:latin typeface="Calibri" pitchFamily="34" charset="0"/>
-                <a:ea typeface="Calibri" pitchFamily="34" charset="-122"/>
-                <a:cs typeface="Calibri" pitchFamily="34" charset="-120"/>
-              </a:rPr>
-              <a:t>'e' dropped from 'reduce' before vowel suffix</a:t>
-            </a:r>
-            <a:endParaRPr lang="en-US" sz="700" dirty="0"/>
-          </a:p>
-        </p:txBody>
-      </p:sp>
-      <p:sp>
-        <p:nvSpPr>
-          <p:cNvPr id="23" name="Shape 21"/>
+          <p:cNvPr id="22" name="Shape 20"/>
           <p:cNvSpPr/>
           <p:nvPr/>
         </p:nvSpPr>
@@ -33770,7 +33665,7 @@
       </p:sp>
       <p:sp>
         <p:nvSpPr>
-          <p:cNvPr id="24" name="Text 22"/>
+          <p:cNvPr id="23" name="Text 21"/>
           <p:cNvSpPr/>
           <p:nvPr/>
         </p:nvSpPr>
@@ -33801,7 +33696,7 @@
                 <a:ea typeface="Trebuchet MS" pitchFamily="34" charset="-122"/>
                 <a:cs typeface="Trebuchet MS" pitchFamily="34" charset="-120"/>
               </a:rPr>
-              <a:t>tion</a:t>
+              <a:t>ed</a:t>
             </a:r>
             <a:endParaRPr lang="en-US" sz="1300" dirty="0"/>
           </a:p>
@@ -33809,7 +33704,7 @@
       </p:sp>
       <p:sp>
         <p:nvSpPr>
-          <p:cNvPr id="25" name="Text 23"/>
+          <p:cNvPr id="24" name="Text 22"/>
           <p:cNvSpPr/>
           <p:nvPr/>
         </p:nvSpPr>
@@ -33840,9 +33735,48 @@
                 <a:ea typeface="Calibri" pitchFamily="34" charset="-122"/>
                 <a:cs typeface="Calibri" pitchFamily="34" charset="-120"/>
               </a:rPr>
-              <a:t>act or process of</a:t>
+              <a:t>past tense</a:t>
             </a:r>
             <a:endParaRPr lang="en-US" sz="850" dirty="0"/>
+          </a:p>
+        </p:txBody>
+      </p:sp>
+      <p:sp>
+        <p:nvSpPr>
+          <p:cNvPr id="25" name="Text 23"/>
+          <p:cNvSpPr/>
+          <p:nvPr/>
+        </p:nvSpPr>
+        <p:spPr>
+          <a:xfrm>
+            <a:off x="6519672" y="2752344"/>
+            <a:ext cx="1828800" cy="182880"/>
+          </a:xfrm>
+          <a:prstGeom prst="rect">
+            <a:avLst/>
+          </a:prstGeom>
+          <a:noFill/>
+          <a:ln/>
+        </p:spPr>
+        <p:txBody>
+          <a:bodyPr wrap="square" lIns="0" tIns="0" rIns="0" bIns="0" rtlCol="0" anchor="t"/>
+          <a:lstStyle/>
+          <a:p>
+            <a:pPr algn="ctr" indent="0" marL="0">
+              <a:buNone/>
+            </a:pPr>
+            <a:r>
+              <a:rPr lang="en-US" sz="700" i="1" dirty="0">
+                <a:solidFill>
+                  <a:srgbClr val="94A3B8"/>
+                </a:solidFill>
+                <a:latin typeface="Calibri" pitchFamily="34" charset="0"/>
+                <a:ea typeface="Calibri" pitchFamily="34" charset="-122"/>
+                <a:cs typeface="Calibri" pitchFamily="34" charset="-120"/>
+              </a:rPr>
+              <a:t>'e' dropped before vowel suffix</a:t>
+            </a:r>
+            <a:endParaRPr lang="en-US" sz="700" dirty="0"/>
           </a:p>
         </p:txBody>
       </p:sp>
@@ -33947,7 +33881,7 @@
         </p:nvSpPr>
         <p:spPr>
           <a:xfrm>
-            <a:off x="2313432" y="3364992"/>
+            <a:off x="2999232" y="3364992"/>
             <a:ext cx="1645920" cy="475488"/>
           </a:xfrm>
           <a:prstGeom prst="rect">
@@ -33974,7 +33908,7 @@
         </p:nvSpPr>
         <p:spPr>
           <a:xfrm>
-            <a:off x="2313432" y="3364992"/>
+            <a:off x="2999232" y="3364992"/>
             <a:ext cx="1645920" cy="475488"/>
           </a:xfrm>
           <a:prstGeom prst="rect">
@@ -34013,8 +33947,8 @@
         </p:nvSpPr>
         <p:spPr>
           <a:xfrm>
-            <a:off x="3959352" y="3364992"/>
-            <a:ext cx="411480" cy="475488"/>
+            <a:off x="4645152" y="3364992"/>
+            <a:ext cx="1097280" cy="475488"/>
           </a:xfrm>
           <a:prstGeom prst="rect">
             <a:avLst/>
@@ -34052,7 +33986,7 @@
         </p:nvSpPr>
         <p:spPr>
           <a:xfrm>
-            <a:off x="4370832" y="3364992"/>
+            <a:off x="5742432" y="3364992"/>
             <a:ext cx="1645920" cy="475488"/>
           </a:xfrm>
           <a:prstGeom prst="rect">
@@ -34079,7 +34013,7 @@
         </p:nvSpPr>
         <p:spPr>
           <a:xfrm>
-            <a:off x="4370832" y="3364992"/>
+            <a:off x="5742432" y="3364992"/>
             <a:ext cx="1645920" cy="475488"/>
           </a:xfrm>
           <a:prstGeom prst="rect">
@@ -34104,7 +34038,7 @@
                 <a:ea typeface="Trebuchet MS" pitchFamily="34" charset="-122"/>
                 <a:cs typeface="Trebuchet MS" pitchFamily="34" charset="-120"/>
               </a:rPr>
-              <a:t>duc</a:t>
+              <a:t>duced</a:t>
             </a:r>
             <a:endParaRPr lang="en-US" sz="1400" dirty="0"/>
           </a:p>
@@ -34112,14 +34046,41 @@
       </p:sp>
       <p:sp>
         <p:nvSpPr>
-          <p:cNvPr id="34" name="Text 32"/>
-          <p:cNvSpPr/>
-          <p:nvPr/>
-        </p:nvSpPr>
-        <p:spPr>
-          <a:xfrm>
-            <a:off x="6016752" y="3364992"/>
-            <a:ext cx="411480" cy="475488"/>
+          <p:cNvPr id="34" name="Shape 32"/>
+          <p:cNvSpPr/>
+          <p:nvPr/>
+        </p:nvSpPr>
+        <p:spPr>
+          <a:xfrm>
+            <a:off x="365760" y="4096512"/>
+            <a:ext cx="1371600" cy="804672"/>
+          </a:xfrm>
+          <a:prstGeom prst="rect">
+            <a:avLst>
+              <a:gd name="adj" fmla="val 6818"/>
+            </a:avLst>
+          </a:prstGeom>
+          <a:solidFill>
+            <a:srgbClr val="E2E8F0"/>
+          </a:solidFill>
+          <a:ln w="12700">
+            <a:solidFill>
+              <a:srgbClr val="E2E8F0"/>
+            </a:solidFill>
+            <a:prstDash val="solid"/>
+          </a:ln>
+        </p:spPr>
+      </p:sp>
+      <p:sp>
+        <p:nvSpPr>
+          <p:cNvPr id="35" name="Text 33"/>
+          <p:cNvSpPr/>
+          <p:nvPr/>
+        </p:nvSpPr>
+        <p:spPr>
+          <a:xfrm>
+            <a:off x="365760" y="4096512"/>
+            <a:ext cx="1371600" cy="804672"/>
           </a:xfrm>
           <a:prstGeom prst="rect">
             <a:avLst/>
@@ -34135,96 +34096,30 @@
               <a:buNone/>
             </a:pPr>
             <a:r>
-              <a:rPr lang="en-US" sz="1600" b="1" dirty="0">
-                <a:solidFill>
-                  <a:srgbClr val="0D9488"/>
+              <a:rPr lang="en-US" sz="1100" b="1" dirty="0">
+                <a:solidFill>
+                  <a:srgbClr val="475569"/>
                 </a:solidFill>
                 <a:latin typeface="Trebuchet MS" pitchFamily="34" charset="0"/>
                 <a:ea typeface="Trebuchet MS" pitchFamily="34" charset="-122"/>
                 <a:cs typeface="Trebuchet MS" pitchFamily="34" charset="-120"/>
               </a:rPr>
-              <a:t>·</a:t>
-            </a:r>
-            <a:endParaRPr lang="en-US" sz="1600" dirty="0"/>
-          </a:p>
-        </p:txBody>
-      </p:sp>
-      <p:sp>
-        <p:nvSpPr>
-          <p:cNvPr id="35" name="Shape 33"/>
-          <p:cNvSpPr/>
-          <p:nvPr/>
-        </p:nvSpPr>
-        <p:spPr>
-          <a:xfrm>
-            <a:off x="6428232" y="3364992"/>
-            <a:ext cx="1645920" cy="475488"/>
-          </a:xfrm>
-          <a:prstGeom prst="rect">
-            <a:avLst>
-              <a:gd name="adj" fmla="val 9615"/>
-            </a:avLst>
-          </a:prstGeom>
-          <a:solidFill>
-            <a:srgbClr val="FFFFFF"/>
-          </a:solidFill>
-          <a:ln w="12700">
-            <a:solidFill>
-              <a:srgbClr val="0D9488"/>
-            </a:solidFill>
-            <a:prstDash val="solid"/>
-          </a:ln>
-        </p:spPr>
-      </p:sp>
-      <p:sp>
-        <p:nvSpPr>
-          <p:cNvPr id="36" name="Text 34"/>
-          <p:cNvSpPr/>
-          <p:nvPr/>
-        </p:nvSpPr>
-        <p:spPr>
-          <a:xfrm>
-            <a:off x="6428232" y="3364992"/>
-            <a:ext cx="1645920" cy="475488"/>
-          </a:xfrm>
-          <a:prstGeom prst="rect">
-            <a:avLst/>
-          </a:prstGeom>
-          <a:noFill/>
-          <a:ln/>
-        </p:spPr>
-        <p:txBody>
-          <a:bodyPr wrap="square" lIns="0" tIns="0" rIns="0" bIns="0" rtlCol="0" anchor="ctr"/>
-          <a:lstStyle/>
-          <a:p>
-            <a:pPr algn="ctr" indent="0" marL="0">
-              <a:buNone/>
-            </a:pPr>
-            <a:r>
-              <a:rPr lang="en-US" sz="1400" b="1" dirty="0">
-                <a:solidFill>
-                  <a:srgbClr val="0D9488"/>
-                </a:solidFill>
-                <a:latin typeface="Trebuchet MS" pitchFamily="34" charset="0"/>
-                <a:ea typeface="Trebuchet MS" pitchFamily="34" charset="-122"/>
-                <a:cs typeface="Trebuchet MS" pitchFamily="34" charset="-120"/>
-              </a:rPr>
-              <a:t>tion</a:t>
-            </a:r>
-            <a:endParaRPr lang="en-US" sz="1400" dirty="0"/>
-          </a:p>
-        </p:txBody>
-      </p:sp>
-      <p:sp>
-        <p:nvSpPr>
-          <p:cNvPr id="37" name="Shape 35"/>
-          <p:cNvSpPr/>
-          <p:nvPr/>
-        </p:nvSpPr>
-        <p:spPr>
-          <a:xfrm>
-            <a:off x="365760" y="4096512"/>
-            <a:ext cx="1371600" cy="804672"/>
+              <a:t>Phonemes</a:t>
+            </a:r>
+            <a:endParaRPr lang="en-US" sz="1100" dirty="0"/>
+          </a:p>
+        </p:txBody>
+      </p:sp>
+      <p:sp>
+        <p:nvSpPr>
+          <p:cNvPr id="36" name="Shape 34"/>
+          <p:cNvSpPr/>
+          <p:nvPr/>
+        </p:nvSpPr>
+        <p:spPr>
+          <a:xfrm>
+            <a:off x="1874520" y="4096512"/>
+            <a:ext cx="6903720" cy="804672"/>
           </a:xfrm>
           <a:prstGeom prst="rect">
             <a:avLst>
@@ -34232,85 +34127,19 @@
             </a:avLst>
           </a:prstGeom>
           <a:solidFill>
-            <a:srgbClr val="E2E8F0"/>
+            <a:srgbClr val="F8FAFC"/>
           </a:solidFill>
           <a:ln w="12700">
             <a:solidFill>
               <a:srgbClr val="E2E8F0"/>
             </a:solidFill>
-            <a:prstDash val="solid"/>
-          </a:ln>
-        </p:spPr>
-      </p:sp>
-      <p:sp>
-        <p:nvSpPr>
-          <p:cNvPr id="38" name="Text 36"/>
-          <p:cNvSpPr/>
-          <p:nvPr/>
-        </p:nvSpPr>
-        <p:spPr>
-          <a:xfrm>
-            <a:off x="365760" y="4096512"/>
-            <a:ext cx="1371600" cy="804672"/>
-          </a:xfrm>
-          <a:prstGeom prst="rect">
-            <a:avLst/>
-          </a:prstGeom>
-          <a:noFill/>
-          <a:ln/>
-        </p:spPr>
-        <p:txBody>
-          <a:bodyPr wrap="square" lIns="0" tIns="0" rIns="0" bIns="0" rtlCol="0" anchor="ctr"/>
-          <a:lstStyle/>
-          <a:p>
-            <a:pPr algn="ctr" indent="0" marL="0">
-              <a:buNone/>
-            </a:pPr>
-            <a:r>
-              <a:rPr lang="en-US" sz="1100" b="1" dirty="0">
-                <a:solidFill>
-                  <a:srgbClr val="475569"/>
-                </a:solidFill>
-                <a:latin typeface="Trebuchet MS" pitchFamily="34" charset="0"/>
-                <a:ea typeface="Trebuchet MS" pitchFamily="34" charset="-122"/>
-                <a:cs typeface="Trebuchet MS" pitchFamily="34" charset="-120"/>
-              </a:rPr>
-              <a:t>Phonemes</a:t>
-            </a:r>
-            <a:endParaRPr lang="en-US" sz="1100" dirty="0"/>
-          </a:p>
-        </p:txBody>
-      </p:sp>
-      <p:sp>
-        <p:nvSpPr>
-          <p:cNvPr id="39" name="Shape 37"/>
-          <p:cNvSpPr/>
-          <p:nvPr/>
-        </p:nvSpPr>
-        <p:spPr>
-          <a:xfrm>
-            <a:off x="1874520" y="4096512"/>
-            <a:ext cx="6903720" cy="804672"/>
-          </a:xfrm>
-          <a:prstGeom prst="rect">
-            <a:avLst>
-              <a:gd name="adj" fmla="val 6818"/>
-            </a:avLst>
-          </a:prstGeom>
-          <a:solidFill>
-            <a:srgbClr val="F8FAFC"/>
-          </a:solidFill>
-          <a:ln w="12700">
-            <a:solidFill>
-              <a:srgbClr val="E2E8F0"/>
-            </a:solidFill>
             <a:prstDash val="dash"/>
           </a:ln>
         </p:spPr>
       </p:sp>
       <p:sp>
         <p:nvSpPr>
-          <p:cNvPr id="40" name="Text 38"/>
+          <p:cNvPr id="37" name="Text 35"/>
           <p:cNvSpPr/>
           <p:nvPr/>
         </p:nvSpPr>
@@ -34772,7 +34601,7 @@
                 <a:ea typeface="Trebuchet MS" pitchFamily="34" charset="-122"/>
                 <a:cs typeface="Trebuchet MS" pitchFamily="34" charset="-120"/>
               </a:rPr>
-              <a:t>reduction</a:t>
+              <a:t>reduced</a:t>
             </a:r>
             <a:endParaRPr lang="en-US" sz="2800" dirty="0"/>
           </a:p>
@@ -35023,7 +34852,7 @@
                 <a:ea typeface="Trebuchet MS" pitchFamily="34" charset="-122"/>
                 <a:cs typeface="Trebuchet MS" pitchFamily="34" charset="-120"/>
               </a:rPr>
-              <a:t>duc</a:t>
+              <a:t>duce</a:t>
             </a:r>
             <a:endParaRPr lang="en-US" sz="1300" dirty="0"/>
           </a:p>
@@ -35070,46 +34899,7 @@
       </p:sp>
       <p:sp>
         <p:nvSpPr>
-          <p:cNvPr id="22" name="Text 20"/>
-          <p:cNvSpPr/>
-          <p:nvPr/>
-        </p:nvSpPr>
-        <p:spPr>
-          <a:xfrm>
-            <a:off x="4370832" y="2752344"/>
-            <a:ext cx="1828800" cy="182880"/>
-          </a:xfrm>
-          <a:prstGeom prst="rect">
-            <a:avLst/>
-          </a:prstGeom>
-          <a:noFill/>
-          <a:ln/>
-        </p:spPr>
-        <p:txBody>
-          <a:bodyPr wrap="square" lIns="0" tIns="0" rIns="0" bIns="0" rtlCol="0" anchor="t"/>
-          <a:lstStyle/>
-          <a:p>
-            <a:pPr algn="ctr" indent="0" marL="0">
-              <a:buNone/>
-            </a:pPr>
-            <a:r>
-              <a:rPr lang="en-US" sz="700" i="1" dirty="0">
-                <a:solidFill>
-                  <a:srgbClr val="94A3B8"/>
-                </a:solidFill>
-                <a:latin typeface="Calibri" pitchFamily="34" charset="0"/>
-                <a:ea typeface="Calibri" pitchFamily="34" charset="-122"/>
-                <a:cs typeface="Calibri" pitchFamily="34" charset="-120"/>
-              </a:rPr>
-              <a:t>'e' dropped from 'reduce' before vowel suffix</a:t>
-            </a:r>
-            <a:endParaRPr lang="en-US" sz="700" dirty="0"/>
-          </a:p>
-        </p:txBody>
-      </p:sp>
-      <p:sp>
-        <p:nvSpPr>
-          <p:cNvPr id="23" name="Shape 21"/>
+          <p:cNvPr id="22" name="Shape 20"/>
           <p:cNvSpPr/>
           <p:nvPr/>
         </p:nvSpPr>
@@ -35143,7 +34933,7 @@
       </p:sp>
       <p:sp>
         <p:nvSpPr>
-          <p:cNvPr id="24" name="Text 22"/>
+          <p:cNvPr id="23" name="Text 21"/>
           <p:cNvSpPr/>
           <p:nvPr/>
         </p:nvSpPr>
@@ -35174,7 +34964,7 @@
                 <a:ea typeface="Trebuchet MS" pitchFamily="34" charset="-122"/>
                 <a:cs typeface="Trebuchet MS" pitchFamily="34" charset="-120"/>
               </a:rPr>
-              <a:t>tion</a:t>
+              <a:t>ed</a:t>
             </a:r>
             <a:endParaRPr lang="en-US" sz="1300" dirty="0"/>
           </a:p>
@@ -35182,7 +34972,7 @@
       </p:sp>
       <p:sp>
         <p:nvSpPr>
-          <p:cNvPr id="25" name="Text 23"/>
+          <p:cNvPr id="24" name="Text 22"/>
           <p:cNvSpPr/>
           <p:nvPr/>
         </p:nvSpPr>
@@ -35213,9 +35003,48 @@
                 <a:ea typeface="Calibri" pitchFamily="34" charset="-122"/>
                 <a:cs typeface="Calibri" pitchFamily="34" charset="-120"/>
               </a:rPr>
-              <a:t>act or process of</a:t>
+              <a:t>past tense</a:t>
             </a:r>
             <a:endParaRPr lang="en-US" sz="850" dirty="0"/>
+          </a:p>
+        </p:txBody>
+      </p:sp>
+      <p:sp>
+        <p:nvSpPr>
+          <p:cNvPr id="25" name="Text 23"/>
+          <p:cNvSpPr/>
+          <p:nvPr/>
+        </p:nvSpPr>
+        <p:spPr>
+          <a:xfrm>
+            <a:off x="6519672" y="2752344"/>
+            <a:ext cx="1828800" cy="182880"/>
+          </a:xfrm>
+          <a:prstGeom prst="rect">
+            <a:avLst/>
+          </a:prstGeom>
+          <a:noFill/>
+          <a:ln/>
+        </p:spPr>
+        <p:txBody>
+          <a:bodyPr wrap="square" lIns="0" tIns="0" rIns="0" bIns="0" rtlCol="0" anchor="t"/>
+          <a:lstStyle/>
+          <a:p>
+            <a:pPr algn="ctr" indent="0" marL="0">
+              <a:buNone/>
+            </a:pPr>
+            <a:r>
+              <a:rPr lang="en-US" sz="700" i="1" dirty="0">
+                <a:solidFill>
+                  <a:srgbClr val="94A3B8"/>
+                </a:solidFill>
+                <a:latin typeface="Calibri" pitchFamily="34" charset="0"/>
+                <a:ea typeface="Calibri" pitchFamily="34" charset="-122"/>
+                <a:cs typeface="Calibri" pitchFamily="34" charset="-120"/>
+              </a:rPr>
+              <a:t>'e' dropped before vowel suffix</a:t>
+            </a:r>
+            <a:endParaRPr lang="en-US" sz="700" dirty="0"/>
           </a:p>
         </p:txBody>
       </p:sp>
@@ -35320,7 +35149,7 @@
         </p:nvSpPr>
         <p:spPr>
           <a:xfrm>
-            <a:off x="2313432" y="3364992"/>
+            <a:off x="2999232" y="3364992"/>
             <a:ext cx="1645920" cy="475488"/>
           </a:xfrm>
           <a:prstGeom prst="rect">
@@ -35347,7 +35176,7 @@
         </p:nvSpPr>
         <p:spPr>
           <a:xfrm>
-            <a:off x="2313432" y="3364992"/>
+            <a:off x="2999232" y="3364992"/>
             <a:ext cx="1645920" cy="475488"/>
           </a:xfrm>
           <a:prstGeom prst="rect">
@@ -35386,8 +35215,8 @@
         </p:nvSpPr>
         <p:spPr>
           <a:xfrm>
-            <a:off x="3959352" y="3364992"/>
-            <a:ext cx="411480" cy="475488"/>
+            <a:off x="4645152" y="3364992"/>
+            <a:ext cx="1097280" cy="475488"/>
           </a:xfrm>
           <a:prstGeom prst="rect">
             <a:avLst/>
@@ -35425,7 +35254,7 @@
         </p:nvSpPr>
         <p:spPr>
           <a:xfrm>
-            <a:off x="4370832" y="3364992"/>
+            <a:off x="5742432" y="3364992"/>
             <a:ext cx="1645920" cy="475488"/>
           </a:xfrm>
           <a:prstGeom prst="rect">
@@ -35452,7 +35281,7 @@
         </p:nvSpPr>
         <p:spPr>
           <a:xfrm>
-            <a:off x="4370832" y="3364992"/>
+            <a:off x="5742432" y="3364992"/>
             <a:ext cx="1645920" cy="475488"/>
           </a:xfrm>
           <a:prstGeom prst="rect">
@@ -35477,7 +35306,7 @@
                 <a:ea typeface="Trebuchet MS" pitchFamily="34" charset="-122"/>
                 <a:cs typeface="Trebuchet MS" pitchFamily="34" charset="-120"/>
               </a:rPr>
-              <a:t>duc</a:t>
+              <a:t>duced</a:t>
             </a:r>
             <a:endParaRPr lang="en-US" sz="1400" dirty="0"/>
           </a:p>
@@ -35485,14 +35314,41 @@
       </p:sp>
       <p:sp>
         <p:nvSpPr>
-          <p:cNvPr id="34" name="Text 32"/>
-          <p:cNvSpPr/>
-          <p:nvPr/>
-        </p:nvSpPr>
-        <p:spPr>
-          <a:xfrm>
-            <a:off x="6016752" y="3364992"/>
-            <a:ext cx="411480" cy="475488"/>
+          <p:cNvPr id="34" name="Shape 32"/>
+          <p:cNvSpPr/>
+          <p:nvPr/>
+        </p:nvSpPr>
+        <p:spPr>
+          <a:xfrm>
+            <a:off x="365760" y="4096512"/>
+            <a:ext cx="1371600" cy="804672"/>
+          </a:xfrm>
+          <a:prstGeom prst="rect">
+            <a:avLst>
+              <a:gd name="adj" fmla="val 6818"/>
+            </a:avLst>
+          </a:prstGeom>
+          <a:solidFill>
+            <a:srgbClr val="E2E8F0"/>
+          </a:solidFill>
+          <a:ln w="12700">
+            <a:solidFill>
+              <a:srgbClr val="E2E8F0"/>
+            </a:solidFill>
+            <a:prstDash val="solid"/>
+          </a:ln>
+        </p:spPr>
+      </p:sp>
+      <p:sp>
+        <p:nvSpPr>
+          <p:cNvPr id="35" name="Text 33"/>
+          <p:cNvSpPr/>
+          <p:nvPr/>
+        </p:nvSpPr>
+        <p:spPr>
+          <a:xfrm>
+            <a:off x="365760" y="4096512"/>
+            <a:ext cx="1371600" cy="804672"/>
           </a:xfrm>
           <a:prstGeom prst="rect">
             <a:avLst/>
@@ -35508,57 +35364,84 @@
               <a:buNone/>
             </a:pPr>
             <a:r>
-              <a:rPr lang="en-US" sz="1600" b="1" dirty="0">
-                <a:solidFill>
-                  <a:srgbClr val="0D9488"/>
+              <a:rPr lang="en-US" sz="1100" b="1" dirty="0">
+                <a:solidFill>
+                  <a:srgbClr val="475569"/>
                 </a:solidFill>
                 <a:latin typeface="Trebuchet MS" pitchFamily="34" charset="0"/>
                 <a:ea typeface="Trebuchet MS" pitchFamily="34" charset="-122"/>
                 <a:cs typeface="Trebuchet MS" pitchFamily="34" charset="-120"/>
               </a:rPr>
-              <a:t>·</a:t>
-            </a:r>
-            <a:endParaRPr lang="en-US" sz="1600" dirty="0"/>
-          </a:p>
-        </p:txBody>
-      </p:sp>
-      <p:sp>
-        <p:nvSpPr>
-          <p:cNvPr id="35" name="Shape 33"/>
-          <p:cNvSpPr/>
-          <p:nvPr/>
-        </p:nvSpPr>
-        <p:spPr>
-          <a:xfrm>
-            <a:off x="6428232" y="3364992"/>
-            <a:ext cx="1645920" cy="475488"/>
+              <a:t>Phonemes</a:t>
+            </a:r>
+            <a:endParaRPr lang="en-US" sz="1100" dirty="0"/>
+          </a:p>
+        </p:txBody>
+      </p:sp>
+      <p:sp>
+        <p:nvSpPr>
+          <p:cNvPr id="36" name="Shape 34"/>
+          <p:cNvSpPr/>
+          <p:nvPr/>
+        </p:nvSpPr>
+        <p:spPr>
+          <a:xfrm>
+            <a:off x="1874520" y="4096512"/>
+            <a:ext cx="6903720" cy="804672"/>
           </a:xfrm>
           <a:prstGeom prst="rect">
             <a:avLst>
-              <a:gd name="adj" fmla="val 9615"/>
+              <a:gd name="adj" fmla="val 6818"/>
             </a:avLst>
           </a:prstGeom>
           <a:solidFill>
+            <a:srgbClr val="FCE7F3"/>
+          </a:solidFill>
+          <a:ln w="12700">
+            <a:solidFill>
+              <a:srgbClr val="DB2777"/>
+            </a:solidFill>
+            <a:prstDash val="solid"/>
+          </a:ln>
+        </p:spPr>
+      </p:sp>
+      <p:sp>
+        <p:nvSpPr>
+          <p:cNvPr id="37" name="Shape 35"/>
+          <p:cNvSpPr/>
+          <p:nvPr/>
+        </p:nvSpPr>
+        <p:spPr>
+          <a:xfrm>
+            <a:off x="2254649" y="4169664"/>
+            <a:ext cx="685800" cy="384048"/>
+          </a:xfrm>
+          <a:prstGeom prst="rect">
+            <a:avLst>
+              <a:gd name="adj" fmla="val 9524"/>
+            </a:avLst>
+          </a:prstGeom>
+          <a:solidFill>
             <a:srgbClr val="FFFFFF"/>
           </a:solidFill>
           <a:ln w="12700">
             <a:solidFill>
-              <a:srgbClr val="0D9488"/>
-            </a:solidFill>
-            <a:prstDash val="solid"/>
-          </a:ln>
-        </p:spPr>
-      </p:sp>
-      <p:sp>
-        <p:nvSpPr>
-          <p:cNvPr id="36" name="Text 34"/>
-          <p:cNvSpPr/>
-          <p:nvPr/>
-        </p:nvSpPr>
-        <p:spPr>
-          <a:xfrm>
-            <a:off x="6428232" y="3364992"/>
-            <a:ext cx="1645920" cy="475488"/>
+              <a:srgbClr val="DB2777"/>
+            </a:solidFill>
+            <a:prstDash val="solid"/>
+          </a:ln>
+        </p:spPr>
+      </p:sp>
+      <p:sp>
+        <p:nvSpPr>
+          <p:cNvPr id="38" name="Text 36"/>
+          <p:cNvSpPr/>
+          <p:nvPr/>
+        </p:nvSpPr>
+        <p:spPr>
+          <a:xfrm>
+            <a:off x="2254649" y="4169664"/>
+            <a:ext cx="685800" cy="384048"/>
           </a:xfrm>
           <a:prstGeom prst="rect">
             <a:avLst/>
@@ -35574,57 +35457,57 @@
               <a:buNone/>
             </a:pPr>
             <a:r>
-              <a:rPr lang="en-US" sz="1400" b="1" dirty="0">
-                <a:solidFill>
-                  <a:srgbClr val="0D9488"/>
+              <a:rPr lang="en-US" sz="900" b="1" dirty="0">
+                <a:solidFill>
+                  <a:srgbClr val="9D174D"/>
                 </a:solidFill>
                 <a:latin typeface="Trebuchet MS" pitchFamily="34" charset="0"/>
                 <a:ea typeface="Trebuchet MS" pitchFamily="34" charset="-122"/>
                 <a:cs typeface="Trebuchet MS" pitchFamily="34" charset="-120"/>
               </a:rPr>
-              <a:t>tion</a:t>
-            </a:r>
-            <a:endParaRPr lang="en-US" sz="1400" dirty="0"/>
-          </a:p>
-        </p:txBody>
-      </p:sp>
-      <p:sp>
-        <p:nvSpPr>
-          <p:cNvPr id="37" name="Shape 35"/>
-          <p:cNvSpPr/>
-          <p:nvPr/>
-        </p:nvSpPr>
-        <p:spPr>
-          <a:xfrm>
-            <a:off x="365760" y="4096512"/>
-            <a:ext cx="1371600" cy="804672"/>
+              <a:t>r</a:t>
+            </a:r>
+            <a:endParaRPr lang="en-US" sz="900" dirty="0"/>
+          </a:p>
+        </p:txBody>
+      </p:sp>
+      <p:sp>
+        <p:nvSpPr>
+          <p:cNvPr id="39" name="Shape 37"/>
+          <p:cNvSpPr/>
+          <p:nvPr/>
+        </p:nvSpPr>
+        <p:spPr>
+          <a:xfrm>
+            <a:off x="3293146" y="4169664"/>
+            <a:ext cx="685800" cy="384048"/>
           </a:xfrm>
           <a:prstGeom prst="rect">
             <a:avLst>
-              <a:gd name="adj" fmla="val 6818"/>
+              <a:gd name="adj" fmla="val 9524"/>
             </a:avLst>
           </a:prstGeom>
           <a:solidFill>
-            <a:srgbClr val="E2E8F0"/>
-          </a:solidFill>
-          <a:ln w="12700">
-            <a:solidFill>
-              <a:srgbClr val="E2E8F0"/>
-            </a:solidFill>
-            <a:prstDash val="solid"/>
-          </a:ln>
-        </p:spPr>
-      </p:sp>
-      <p:sp>
-        <p:nvSpPr>
-          <p:cNvPr id="38" name="Text 36"/>
-          <p:cNvSpPr/>
-          <p:nvPr/>
-        </p:nvSpPr>
-        <p:spPr>
-          <a:xfrm>
-            <a:off x="365760" y="4096512"/>
-            <a:ext cx="1371600" cy="804672"/>
+            <a:srgbClr val="FFFFFF"/>
+          </a:solidFill>
+          <a:ln w="12700">
+            <a:solidFill>
+              <a:srgbClr val="DB2777"/>
+            </a:solidFill>
+            <a:prstDash val="solid"/>
+          </a:ln>
+        </p:spPr>
+      </p:sp>
+      <p:sp>
+        <p:nvSpPr>
+          <p:cNvPr id="40" name="Text 38"/>
+          <p:cNvSpPr/>
+          <p:nvPr/>
+        </p:nvSpPr>
+        <p:spPr>
+          <a:xfrm>
+            <a:off x="3293146" y="4169664"/>
+            <a:ext cx="685800" cy="384048"/>
           </a:xfrm>
           <a:prstGeom prst="rect">
             <a:avLst/>
@@ -35640,56 +35523,29 @@
               <a:buNone/>
             </a:pPr>
             <a:r>
-              <a:rPr lang="en-US" sz="1100" b="1" dirty="0">
-                <a:solidFill>
-                  <a:srgbClr val="475569"/>
+              <a:rPr lang="en-US" sz="900" b="1" dirty="0">
+                <a:solidFill>
+                  <a:srgbClr val="9D174D"/>
                 </a:solidFill>
                 <a:latin typeface="Trebuchet MS" pitchFamily="34" charset="0"/>
                 <a:ea typeface="Trebuchet MS" pitchFamily="34" charset="-122"/>
                 <a:cs typeface="Trebuchet MS" pitchFamily="34" charset="-120"/>
               </a:rPr>
-              <a:t>Phonemes</a:t>
-            </a:r>
-            <a:endParaRPr lang="en-US" sz="1100" dirty="0"/>
-          </a:p>
-        </p:txBody>
-      </p:sp>
-      <p:sp>
-        <p:nvSpPr>
-          <p:cNvPr id="39" name="Shape 37"/>
-          <p:cNvSpPr/>
-          <p:nvPr/>
-        </p:nvSpPr>
-        <p:spPr>
-          <a:xfrm>
-            <a:off x="1874520" y="4096512"/>
-            <a:ext cx="6903720" cy="804672"/>
-          </a:xfrm>
-          <a:prstGeom prst="rect">
-            <a:avLst>
-              <a:gd name="adj" fmla="val 6818"/>
-            </a:avLst>
-          </a:prstGeom>
-          <a:solidFill>
-            <a:srgbClr val="FCE7F3"/>
-          </a:solidFill>
-          <a:ln w="12700">
-            <a:solidFill>
-              <a:srgbClr val="DB2777"/>
-            </a:solidFill>
-            <a:prstDash val="solid"/>
-          </a:ln>
-        </p:spPr>
-      </p:sp>
-      <p:sp>
-        <p:nvSpPr>
-          <p:cNvPr id="40" name="Shape 38"/>
-          <p:cNvSpPr/>
-          <p:nvPr/>
-        </p:nvSpPr>
-        <p:spPr>
-          <a:xfrm>
-            <a:off x="2023872" y="4169664"/>
+              <a:t>e</a:t>
+            </a:r>
+            <a:endParaRPr lang="en-US" sz="900" dirty="0"/>
+          </a:p>
+        </p:txBody>
+      </p:sp>
+      <p:sp>
+        <p:nvSpPr>
+          <p:cNvPr id="41" name="Shape 39"/>
+          <p:cNvSpPr/>
+          <p:nvPr/>
+        </p:nvSpPr>
+        <p:spPr>
+          <a:xfrm>
+            <a:off x="4331643" y="4169664"/>
             <a:ext cx="685800" cy="384048"/>
           </a:xfrm>
           <a:prstGeom prst="rect">
@@ -35710,13 +35566,13 @@
       </p:sp>
       <p:sp>
         <p:nvSpPr>
-          <p:cNvPr id="41" name="Text 39"/>
-          <p:cNvSpPr/>
-          <p:nvPr/>
-        </p:nvSpPr>
-        <p:spPr>
-          <a:xfrm>
-            <a:off x="2023872" y="4169664"/>
+          <p:cNvPr id="42" name="Text 40"/>
+          <p:cNvSpPr/>
+          <p:nvPr/>
+        </p:nvSpPr>
+        <p:spPr>
+          <a:xfrm>
+            <a:off x="4331643" y="4169664"/>
             <a:ext cx="685800" cy="384048"/>
           </a:xfrm>
           <a:prstGeom prst="rect">
@@ -35741,7 +35597,7 @@
                 <a:ea typeface="Trebuchet MS" pitchFamily="34" charset="-122"/>
                 <a:cs typeface="Trebuchet MS" pitchFamily="34" charset="-120"/>
               </a:rPr>
-              <a:t>r</a:t>
+              <a:t>d</a:t>
             </a:r>
             <a:endParaRPr lang="en-US" sz="900" dirty="0"/>
           </a:p>
@@ -35749,13 +35605,13 @@
       </p:sp>
       <p:sp>
         <p:nvSpPr>
-          <p:cNvPr id="42" name="Shape 40"/>
-          <p:cNvSpPr/>
-          <p:nvPr/>
-        </p:nvSpPr>
-        <p:spPr>
-          <a:xfrm>
-            <a:off x="2831592" y="4169664"/>
+          <p:cNvPr id="43" name="Shape 41"/>
+          <p:cNvSpPr/>
+          <p:nvPr/>
+        </p:nvSpPr>
+        <p:spPr>
+          <a:xfrm>
+            <a:off x="5370141" y="4169664"/>
             <a:ext cx="685800" cy="384048"/>
           </a:xfrm>
           <a:prstGeom prst="rect">
@@ -35776,13 +35632,13 @@
       </p:sp>
       <p:sp>
         <p:nvSpPr>
-          <p:cNvPr id="43" name="Text 41"/>
-          <p:cNvSpPr/>
-          <p:nvPr/>
-        </p:nvSpPr>
-        <p:spPr>
-          <a:xfrm>
-            <a:off x="2831592" y="4169664"/>
+          <p:cNvPr id="44" name="Text 42"/>
+          <p:cNvSpPr/>
+          <p:nvPr/>
+        </p:nvSpPr>
+        <p:spPr>
+          <a:xfrm>
+            <a:off x="5370141" y="4169664"/>
             <a:ext cx="685800" cy="384048"/>
           </a:xfrm>
           <a:prstGeom prst="rect">
@@ -35807,7 +35663,7 @@
                 <a:ea typeface="Trebuchet MS" pitchFamily="34" charset="-122"/>
                 <a:cs typeface="Trebuchet MS" pitchFamily="34" charset="-120"/>
               </a:rPr>
-              <a:t>e</a:t>
+              <a:t>u</a:t>
             </a:r>
             <a:endParaRPr lang="en-US" sz="900" dirty="0"/>
           </a:p>
@@ -35815,13 +35671,13 @@
       </p:sp>
       <p:sp>
         <p:nvSpPr>
-          <p:cNvPr id="44" name="Shape 42"/>
-          <p:cNvSpPr/>
-          <p:nvPr/>
-        </p:nvSpPr>
-        <p:spPr>
-          <a:xfrm>
-            <a:off x="3639312" y="4169664"/>
+          <p:cNvPr id="45" name="Shape 43"/>
+          <p:cNvSpPr/>
+          <p:nvPr/>
+        </p:nvSpPr>
+        <p:spPr>
+          <a:xfrm>
+            <a:off x="6408638" y="4169664"/>
             <a:ext cx="685800" cy="384048"/>
           </a:xfrm>
           <a:prstGeom prst="rect">
@@ -35842,13 +35698,13 @@
       </p:sp>
       <p:sp>
         <p:nvSpPr>
-          <p:cNvPr id="45" name="Text 43"/>
-          <p:cNvSpPr/>
-          <p:nvPr/>
-        </p:nvSpPr>
-        <p:spPr>
-          <a:xfrm>
-            <a:off x="3639312" y="4169664"/>
+          <p:cNvPr id="46" name="Text 44"/>
+          <p:cNvSpPr/>
+          <p:nvPr/>
+        </p:nvSpPr>
+        <p:spPr>
+          <a:xfrm>
+            <a:off x="6408638" y="4169664"/>
             <a:ext cx="685800" cy="384048"/>
           </a:xfrm>
           <a:prstGeom prst="rect">
@@ -35873,7 +35729,7 @@
                 <a:ea typeface="Trebuchet MS" pitchFamily="34" charset="-122"/>
                 <a:cs typeface="Trebuchet MS" pitchFamily="34" charset="-120"/>
               </a:rPr>
-              <a:t>d</a:t>
+              <a:t>ce</a:t>
             </a:r>
             <a:endParaRPr lang="en-US" sz="900" dirty="0"/>
           </a:p>
@@ -35881,13 +35737,52 @@
       </p:sp>
       <p:sp>
         <p:nvSpPr>
-          <p:cNvPr id="46" name="Shape 44"/>
-          <p:cNvSpPr/>
-          <p:nvPr/>
-        </p:nvSpPr>
-        <p:spPr>
-          <a:xfrm>
-            <a:off x="4447032" y="4169664"/>
+          <p:cNvPr id="47" name="Text 45"/>
+          <p:cNvSpPr/>
+          <p:nvPr/>
+        </p:nvSpPr>
+        <p:spPr>
+          <a:xfrm>
+            <a:off x="6408638" y="4572000"/>
+            <a:ext cx="685800" cy="219456"/>
+          </a:xfrm>
+          <a:prstGeom prst="rect">
+            <a:avLst/>
+          </a:prstGeom>
+          <a:noFill/>
+          <a:ln/>
+        </p:spPr>
+        <p:txBody>
+          <a:bodyPr wrap="square" lIns="0" tIns="0" rIns="0" bIns="0" rtlCol="0" anchor="t"/>
+          <a:lstStyle/>
+          <a:p>
+            <a:pPr algn="ctr" indent="0" marL="0">
+              <a:buNone/>
+            </a:pPr>
+            <a:r>
+              <a:rPr lang="en-US" sz="750" i="1" dirty="0">
+                <a:solidFill>
+                  <a:srgbClr val="94A3B8"/>
+                </a:solidFill>
+                <a:latin typeface="Calibri" pitchFamily="34" charset="0"/>
+                <a:ea typeface="Calibri" pitchFamily="34" charset="-122"/>
+                <a:cs typeface="Calibri" pitchFamily="34" charset="-120"/>
+              </a:rPr>
+              <a:t>/s/</a:t>
+            </a:r>
+            <a:endParaRPr lang="en-US" sz="750" dirty="0"/>
+          </a:p>
+        </p:txBody>
+      </p:sp>
+      <p:sp>
+        <p:nvSpPr>
+          <p:cNvPr id="48" name="Shape 46"/>
+          <p:cNvSpPr/>
+          <p:nvPr/>
+        </p:nvSpPr>
+        <p:spPr>
+          <a:xfrm>
+            <a:off x="7447135" y="4169664"/>
             <a:ext cx="685800" cy="384048"/>
           </a:xfrm>
           <a:prstGeom prst="rect">
@@ -35908,13 +35803,13 @@
       </p:sp>
       <p:sp>
         <p:nvSpPr>
-          <p:cNvPr id="47" name="Text 45"/>
-          <p:cNvSpPr/>
-          <p:nvPr/>
-        </p:nvSpPr>
-        <p:spPr>
-          <a:xfrm>
-            <a:off x="4447032" y="4169664"/>
+          <p:cNvPr id="49" name="Text 47"/>
+          <p:cNvSpPr/>
+          <p:nvPr/>
+        </p:nvSpPr>
+        <p:spPr>
+          <a:xfrm>
+            <a:off x="7447135" y="4169664"/>
             <a:ext cx="685800" cy="384048"/>
           </a:xfrm>
           <a:prstGeom prst="rect">
@@ -35939,349 +35834,7 @@
                 <a:ea typeface="Trebuchet MS" pitchFamily="34" charset="-122"/>
                 <a:cs typeface="Trebuchet MS" pitchFamily="34" charset="-120"/>
               </a:rPr>
-              <a:t>u</a:t>
-            </a:r>
-            <a:endParaRPr lang="en-US" sz="900" dirty="0"/>
-          </a:p>
-        </p:txBody>
-      </p:sp>
-      <p:sp>
-        <p:nvSpPr>
-          <p:cNvPr id="48" name="Shape 46"/>
-          <p:cNvSpPr/>
-          <p:nvPr/>
-        </p:nvSpPr>
-        <p:spPr>
-          <a:xfrm>
-            <a:off x="5254752" y="4169664"/>
-            <a:ext cx="685800" cy="384048"/>
-          </a:xfrm>
-          <a:prstGeom prst="rect">
-            <a:avLst>
-              <a:gd name="adj" fmla="val 9524"/>
-            </a:avLst>
-          </a:prstGeom>
-          <a:solidFill>
-            <a:srgbClr val="FFFFFF"/>
-          </a:solidFill>
-          <a:ln w="12700">
-            <a:solidFill>
-              <a:srgbClr val="DB2777"/>
-            </a:solidFill>
-            <a:prstDash val="solid"/>
-          </a:ln>
-        </p:spPr>
-      </p:sp>
-      <p:sp>
-        <p:nvSpPr>
-          <p:cNvPr id="49" name="Text 47"/>
-          <p:cNvSpPr/>
-          <p:nvPr/>
-        </p:nvSpPr>
-        <p:spPr>
-          <a:xfrm>
-            <a:off x="5254752" y="4169664"/>
-            <a:ext cx="685800" cy="384048"/>
-          </a:xfrm>
-          <a:prstGeom prst="rect">
-            <a:avLst/>
-          </a:prstGeom>
-          <a:noFill/>
-          <a:ln/>
-        </p:spPr>
-        <p:txBody>
-          <a:bodyPr wrap="square" lIns="0" tIns="0" rIns="0" bIns="0" rtlCol="0" anchor="ctr"/>
-          <a:lstStyle/>
-          <a:p>
-            <a:pPr algn="ctr" indent="0" marL="0">
-              <a:buNone/>
-            </a:pPr>
-            <a:r>
-              <a:rPr lang="en-US" sz="900" b="1" dirty="0">
-                <a:solidFill>
-                  <a:srgbClr val="9D174D"/>
-                </a:solidFill>
-                <a:latin typeface="Trebuchet MS" pitchFamily="34" charset="0"/>
-                <a:ea typeface="Trebuchet MS" pitchFamily="34" charset="-122"/>
-                <a:cs typeface="Trebuchet MS" pitchFamily="34" charset="-120"/>
-              </a:rPr>
-              <a:t>c</a:t>
-            </a:r>
-            <a:endParaRPr lang="en-US" sz="900" dirty="0"/>
-          </a:p>
-        </p:txBody>
-      </p:sp>
-      <p:sp>
-        <p:nvSpPr>
-          <p:cNvPr id="50" name="Text 48"/>
-          <p:cNvSpPr/>
-          <p:nvPr/>
-        </p:nvSpPr>
-        <p:spPr>
-          <a:xfrm>
-            <a:off x="5254752" y="4572000"/>
-            <a:ext cx="685800" cy="219456"/>
-          </a:xfrm>
-          <a:prstGeom prst="rect">
-            <a:avLst/>
-          </a:prstGeom>
-          <a:noFill/>
-          <a:ln/>
-        </p:spPr>
-        <p:txBody>
-          <a:bodyPr wrap="square" lIns="0" tIns="0" rIns="0" bIns="0" rtlCol="0" anchor="t"/>
-          <a:lstStyle/>
-          <a:p>
-            <a:pPr algn="ctr" indent="0" marL="0">
-              <a:buNone/>
-            </a:pPr>
-            <a:r>
-              <a:rPr lang="en-US" sz="750" i="1" dirty="0">
-                <a:solidFill>
-                  <a:srgbClr val="94A3B8"/>
-                </a:solidFill>
-                <a:latin typeface="Calibri" pitchFamily="34" charset="0"/>
-                <a:ea typeface="Calibri" pitchFamily="34" charset="-122"/>
-                <a:cs typeface="Calibri" pitchFamily="34" charset="-120"/>
-              </a:rPr>
-              <a:t>/k/</a:t>
-            </a:r>
-            <a:endParaRPr lang="en-US" sz="750" dirty="0"/>
-          </a:p>
-        </p:txBody>
-      </p:sp>
-      <p:sp>
-        <p:nvSpPr>
-          <p:cNvPr id="51" name="Shape 49"/>
-          <p:cNvSpPr/>
-          <p:nvPr/>
-        </p:nvSpPr>
-        <p:spPr>
-          <a:xfrm>
-            <a:off x="6062472" y="4169664"/>
-            <a:ext cx="685800" cy="384048"/>
-          </a:xfrm>
-          <a:prstGeom prst="rect">
-            <a:avLst>
-              <a:gd name="adj" fmla="val 9524"/>
-            </a:avLst>
-          </a:prstGeom>
-          <a:solidFill>
-            <a:srgbClr val="FFFFFF"/>
-          </a:solidFill>
-          <a:ln w="12700">
-            <a:solidFill>
-              <a:srgbClr val="DB2777"/>
-            </a:solidFill>
-            <a:prstDash val="solid"/>
-          </a:ln>
-        </p:spPr>
-      </p:sp>
-      <p:sp>
-        <p:nvSpPr>
-          <p:cNvPr id="52" name="Text 50"/>
-          <p:cNvSpPr/>
-          <p:nvPr/>
-        </p:nvSpPr>
-        <p:spPr>
-          <a:xfrm>
-            <a:off x="6062472" y="4169664"/>
-            <a:ext cx="685800" cy="384048"/>
-          </a:xfrm>
-          <a:prstGeom prst="rect">
-            <a:avLst/>
-          </a:prstGeom>
-          <a:noFill/>
-          <a:ln/>
-        </p:spPr>
-        <p:txBody>
-          <a:bodyPr wrap="square" lIns="0" tIns="0" rIns="0" bIns="0" rtlCol="0" anchor="ctr"/>
-          <a:lstStyle/>
-          <a:p>
-            <a:pPr algn="ctr" indent="0" marL="0">
-              <a:buNone/>
-            </a:pPr>
-            <a:r>
-              <a:rPr lang="en-US" sz="900" b="1" dirty="0">
-                <a:solidFill>
-                  <a:srgbClr val="9D174D"/>
-                </a:solidFill>
-                <a:latin typeface="Trebuchet MS" pitchFamily="34" charset="0"/>
-                <a:ea typeface="Trebuchet MS" pitchFamily="34" charset="-122"/>
-                <a:cs typeface="Trebuchet MS" pitchFamily="34" charset="-120"/>
-              </a:rPr>
-              <a:t>t</a:t>
-            </a:r>
-            <a:endParaRPr lang="en-US" sz="900" dirty="0"/>
-          </a:p>
-        </p:txBody>
-      </p:sp>
-      <p:sp>
-        <p:nvSpPr>
-          <p:cNvPr id="53" name="Text 51"/>
-          <p:cNvSpPr/>
-          <p:nvPr/>
-        </p:nvSpPr>
-        <p:spPr>
-          <a:xfrm>
-            <a:off x="6062472" y="4572000"/>
-            <a:ext cx="685800" cy="219456"/>
-          </a:xfrm>
-          <a:prstGeom prst="rect">
-            <a:avLst/>
-          </a:prstGeom>
-          <a:noFill/>
-          <a:ln/>
-        </p:spPr>
-        <p:txBody>
-          <a:bodyPr wrap="square" lIns="0" tIns="0" rIns="0" bIns="0" rtlCol="0" anchor="t"/>
-          <a:lstStyle/>
-          <a:p>
-            <a:pPr algn="ctr" indent="0" marL="0">
-              <a:buNone/>
-            </a:pPr>
-            <a:r>
-              <a:rPr lang="en-US" sz="750" i="1" dirty="0">
-                <a:solidFill>
-                  <a:srgbClr val="94A3B8"/>
-                </a:solidFill>
-                <a:latin typeface="Calibri" pitchFamily="34" charset="0"/>
-                <a:ea typeface="Calibri" pitchFamily="34" charset="-122"/>
-                <a:cs typeface="Calibri" pitchFamily="34" charset="-120"/>
-              </a:rPr>
-              <a:t>/sh/</a:t>
-            </a:r>
-            <a:endParaRPr lang="en-US" sz="750" dirty="0"/>
-          </a:p>
-        </p:txBody>
-      </p:sp>
-      <p:sp>
-        <p:nvSpPr>
-          <p:cNvPr id="54" name="Shape 52"/>
-          <p:cNvSpPr/>
-          <p:nvPr/>
-        </p:nvSpPr>
-        <p:spPr>
-          <a:xfrm>
-            <a:off x="6870192" y="4169664"/>
-            <a:ext cx="685800" cy="384048"/>
-          </a:xfrm>
-          <a:prstGeom prst="rect">
-            <a:avLst>
-              <a:gd name="adj" fmla="val 9524"/>
-            </a:avLst>
-          </a:prstGeom>
-          <a:solidFill>
-            <a:srgbClr val="FFFFFF"/>
-          </a:solidFill>
-          <a:ln w="12700">
-            <a:solidFill>
-              <a:srgbClr val="DB2777"/>
-            </a:solidFill>
-            <a:prstDash val="solid"/>
-          </a:ln>
-        </p:spPr>
-      </p:sp>
-      <p:sp>
-        <p:nvSpPr>
-          <p:cNvPr id="55" name="Text 53"/>
-          <p:cNvSpPr/>
-          <p:nvPr/>
-        </p:nvSpPr>
-        <p:spPr>
-          <a:xfrm>
-            <a:off x="6870192" y="4169664"/>
-            <a:ext cx="685800" cy="384048"/>
-          </a:xfrm>
-          <a:prstGeom prst="rect">
-            <a:avLst/>
-          </a:prstGeom>
-          <a:noFill/>
-          <a:ln/>
-        </p:spPr>
-        <p:txBody>
-          <a:bodyPr wrap="square" lIns="0" tIns="0" rIns="0" bIns="0" rtlCol="0" anchor="ctr"/>
-          <a:lstStyle/>
-          <a:p>
-            <a:pPr algn="ctr" indent="0" marL="0">
-              <a:buNone/>
-            </a:pPr>
-            <a:r>
-              <a:rPr lang="en-US" sz="900" b="1" dirty="0">
-                <a:solidFill>
-                  <a:srgbClr val="9D174D"/>
-                </a:solidFill>
-                <a:latin typeface="Trebuchet MS" pitchFamily="34" charset="0"/>
-                <a:ea typeface="Trebuchet MS" pitchFamily="34" charset="-122"/>
-                <a:cs typeface="Trebuchet MS" pitchFamily="34" charset="-120"/>
-              </a:rPr>
-              <a:t>io</a:t>
-            </a:r>
-            <a:endParaRPr lang="en-US" sz="900" dirty="0"/>
-          </a:p>
-        </p:txBody>
-      </p:sp>
-      <p:sp>
-        <p:nvSpPr>
-          <p:cNvPr id="56" name="Shape 54"/>
-          <p:cNvSpPr/>
-          <p:nvPr/>
-        </p:nvSpPr>
-        <p:spPr>
-          <a:xfrm>
-            <a:off x="7677912" y="4169664"/>
-            <a:ext cx="685800" cy="384048"/>
-          </a:xfrm>
-          <a:prstGeom prst="rect">
-            <a:avLst>
-              <a:gd name="adj" fmla="val 9524"/>
-            </a:avLst>
-          </a:prstGeom>
-          <a:solidFill>
-            <a:srgbClr val="FFFFFF"/>
-          </a:solidFill>
-          <a:ln w="12700">
-            <a:solidFill>
-              <a:srgbClr val="DB2777"/>
-            </a:solidFill>
-            <a:prstDash val="solid"/>
-          </a:ln>
-        </p:spPr>
-      </p:sp>
-      <p:sp>
-        <p:nvSpPr>
-          <p:cNvPr id="57" name="Text 55"/>
-          <p:cNvSpPr/>
-          <p:nvPr/>
-        </p:nvSpPr>
-        <p:spPr>
-          <a:xfrm>
-            <a:off x="7677912" y="4169664"/>
-            <a:ext cx="685800" cy="384048"/>
-          </a:xfrm>
-          <a:prstGeom prst="rect">
-            <a:avLst/>
-          </a:prstGeom>
-          <a:noFill/>
-          <a:ln/>
-        </p:spPr>
-        <p:txBody>
-          <a:bodyPr wrap="square" lIns="0" tIns="0" rIns="0" bIns="0" rtlCol="0" anchor="ctr"/>
-          <a:lstStyle/>
-          <a:p>
-            <a:pPr algn="ctr" indent="0" marL="0">
-              <a:buNone/>
-            </a:pPr>
-            <a:r>
-              <a:rPr lang="en-US" sz="900" b="1" dirty="0">
-                <a:solidFill>
-                  <a:srgbClr val="9D174D"/>
-                </a:solidFill>
-                <a:latin typeface="Trebuchet MS" pitchFamily="34" charset="0"/>
-                <a:ea typeface="Trebuchet MS" pitchFamily="34" charset="-122"/>
-                <a:cs typeface="Trebuchet MS" pitchFamily="34" charset="-120"/>
-              </a:rPr>
-              <a:t>n</a:t>
+              <a:t>d</a:t>
             </a:r>
             <a:endParaRPr lang="en-US" sz="900" dirty="0"/>
           </a:p>
@@ -38171,7 +37724,7 @@
                 <a:ea typeface="Trebuchet MS" pitchFamily="34" charset="-122"/>
                 <a:cs typeface="Trebuchet MS" pitchFamily="34" charset="-120"/>
               </a:rPr>
-              <a:t>-tion</a:t>
+              <a:t>-ed</a:t>
             </a:r>
             <a:endParaRPr lang="en-US" sz="1300" dirty="0"/>
           </a:p>
@@ -38388,7 +37941,7 @@
                 <a:ea typeface="Trebuchet MS" pitchFamily="34" charset="-122"/>
                 <a:cs typeface="Trebuchet MS" pitchFamily="34" charset="-120"/>
               </a:rPr>
-              <a:t>pro-</a:t>
+              <a:t>un-</a:t>
             </a:r>
             <a:endParaRPr lang="en-US" sz="1300" dirty="0"/>
           </a:p>
@@ -38477,7 +38030,7 @@
                 <a:ea typeface="Trebuchet MS" pitchFamily="34" charset="-122"/>
                 <a:cs typeface="Trebuchet MS" pitchFamily="34" charset="-120"/>
               </a:rPr>
-              <a:t>-ed</a:t>
+              <a:t>-tion</a:t>
             </a:r>
             <a:endParaRPr lang="en-US" sz="1300" dirty="0"/>
           </a:p>
@@ -38541,7 +38094,7 @@
                 <a:ea typeface="Trebuchet MS" pitchFamily="34" charset="-122"/>
                 <a:cs typeface="Trebuchet MS" pitchFamily="34" charset="-120"/>
               </a:rPr>
-              <a:t>in-</a:t>
+              <a:t>over-</a:t>
             </a:r>
             <a:endParaRPr lang="en-US" sz="1300" dirty="0"/>
           </a:p>
@@ -38630,7 +38183,7 @@
                 <a:ea typeface="Trebuchet MS" pitchFamily="34" charset="-122"/>
                 <a:cs typeface="Trebuchet MS" pitchFamily="34" charset="-120"/>
               </a:rPr>
-              <a:t>-er</a:t>
+              <a:t>-ible</a:t>
             </a:r>
             <a:endParaRPr lang="en-US" sz="1300" dirty="0"/>
           </a:p>
@@ -38694,7 +38247,7 @@
                 <a:ea typeface="Trebuchet MS" pitchFamily="34" charset="-122"/>
                 <a:cs typeface="Trebuchet MS" pitchFamily="34" charset="-120"/>
               </a:rPr>
-              <a:t>de-</a:t>
+              <a:t>sub-</a:t>
             </a:r>
             <a:endParaRPr lang="en-US" sz="1300" dirty="0"/>
           </a:p>
@@ -38783,7 +38336,7 @@
                 <a:ea typeface="Trebuchet MS" pitchFamily="34" charset="-122"/>
                 <a:cs typeface="Trebuchet MS" pitchFamily="34" charset="-120"/>
               </a:rPr>
-              <a:t>-ible</a:t>
+              <a:t>-er</a:t>
             </a:r>
             <a:endParaRPr lang="en-US" sz="1300" dirty="0"/>
           </a:p>
@@ -39152,7 +38705,7 @@
                 <a:ea typeface="Trebuchet MS" pitchFamily="34" charset="-122"/>
                 <a:cs typeface="Trebuchet MS" pitchFamily="34" charset="-120"/>
               </a:rPr>
-              <a:t>reductions</a:t>
+              <a:t>reducible</a:t>
             </a:r>
             <a:endParaRPr lang="en-US" sz="1200" dirty="0"/>
           </a:p>
@@ -39284,7 +38837,7 @@
                 <a:ea typeface="Trebuchet MS" pitchFamily="34" charset="-122"/>
                 <a:cs typeface="Trebuchet MS" pitchFamily="34" charset="-120"/>
               </a:rPr>
-              <a:t>reducible</a:t>
+              <a:t>irreducible</a:t>
             </a:r>
             <a:endParaRPr lang="en-US" sz="1200" dirty="0"/>
           </a:p>
@@ -39350,7 +38903,7 @@
                 <a:ea typeface="Trebuchet MS" pitchFamily="34" charset="-122"/>
                 <a:cs typeface="Trebuchet MS" pitchFamily="34" charset="-120"/>
               </a:rPr>
-              <a:t>irreducible</a:t>
+              <a:t>overreduced</a:t>
             </a:r>
             <a:endParaRPr lang="en-US" sz="1200" dirty="0"/>
           </a:p>
@@ -40538,7 +40091,7 @@
                 <a:ea typeface="Calibri" pitchFamily="34" charset="-122"/>
                 <a:cs typeface="Calibri" pitchFamily="34" charset="-120"/>
               </a:rPr>
-              <a:t>1.  The root 'reduce' comes from Latin and means to lead back or make smaller.</a:t>
+              <a:t>1.  The word 'reducible' means it cannot be changed in any way.</a:t>
             </a:r>
             <a:endParaRPr lang="en-US" sz="1300" dirty="0"/>
           </a:p>
@@ -40561,11 +40114,11 @@
             </a:avLst>
           </a:prstGeom>
           <a:solidFill>
-            <a:srgbClr val="DCFCE7"/>
-          </a:solidFill>
-          <a:ln w="12700">
-            <a:solidFill>
-              <a:srgbClr val="16A34A"/>
+            <a:srgbClr val="FEE2E2"/>
+          </a:solidFill>
+          <a:ln w="12700">
+            <a:solidFill>
+              <a:srgbClr val="DC2626"/>
             </a:solidFill>
             <a:prstDash val="solid"/>
           </a:ln>
@@ -40598,13 +40151,13 @@
             <a:r>
               <a:rPr lang="en-US" sz="1100" b="1" dirty="0">
                 <a:solidFill>
-                  <a:srgbClr val="16A34A"/>
+                  <a:srgbClr val="DC2626"/>
                 </a:solidFill>
                 <a:latin typeface="Trebuchet MS" pitchFamily="34" charset="0"/>
                 <a:ea typeface="Trebuchet MS" pitchFamily="34" charset="-122"/>
                 <a:cs typeface="Trebuchet MS" pitchFamily="34" charset="-120"/>
               </a:rPr>
-              <a:t>TRUE</a:t>
+              <a:t>FALSE</a:t>
             </a:r>
             <a:endParaRPr lang="en-US" sz="1100" dirty="0"/>
           </a:p>
@@ -40677,7 +40230,7 @@
                 <a:ea typeface="Calibri" pitchFamily="34" charset="-122"/>
                 <a:cs typeface="Calibri" pitchFamily="34" charset="-120"/>
               </a:rPr>
-              <a:t>2.  The word 'irreducible' means something that can easily be made smaller.</a:t>
+              <a:t>2.  The word 'reducer' describes something that makes things larger.</a:t>
             </a:r>
             <a:endParaRPr lang="en-US" sz="1300" dirty="0"/>
           </a:p>
@@ -40816,7 +40369,7 @@
                 <a:ea typeface="Calibri" pitchFamily="34" charset="-122"/>
                 <a:cs typeface="Calibri" pitchFamily="34" charset="-120"/>
               </a:rPr>
-              <a:t>3.  The suffix '-tion' in 'reduction' turns the verb into a noun.</a:t>
+              <a:t>3.  The prefix 'ir-' in 'irreducible' means not.</a:t>
             </a:r>
             <a:endParaRPr lang="en-US" sz="1300" dirty="0"/>
           </a:p>
@@ -40955,7 +40508,7 @@
                 <a:ea typeface="Calibri" pitchFamily="34" charset="-122"/>
                 <a:cs typeface="Calibri" pitchFamily="34" charset="-120"/>
               </a:rPr>
-              <a:t>4.  A 'reducer' is something that helps make an amount or size smaller.</a:t>
+              <a:t>4.  The suffix '-tion' in 'reduction' turns the verb into a noun.</a:t>
             </a:r>
             <a:endParaRPr lang="en-US" sz="1300" dirty="0"/>
           </a:p>
@@ -41094,7 +40647,7 @@
                 <a:ea typeface="Calibri" pitchFamily="34" charset="-122"/>
                 <a:cs typeface="Calibri" pitchFamily="34" charset="-120"/>
               </a:rPr>
-              <a:t>5.  The word 'reducing' is a noun describing a finished action.</a:t>
+              <a:t>5.  The root 'reduce' comes from Latin.</a:t>
             </a:r>
             <a:endParaRPr lang="en-US" sz="1300" dirty="0"/>
           </a:p>
@@ -41117,11 +40670,11 @@
             </a:avLst>
           </a:prstGeom>
           <a:solidFill>
-            <a:srgbClr val="FEE2E2"/>
-          </a:solidFill>
-          <a:ln w="12700">
-            <a:solidFill>
-              <a:srgbClr val="DC2626"/>
+            <a:srgbClr val="DCFCE7"/>
+          </a:solidFill>
+          <a:ln w="12700">
+            <a:solidFill>
+              <a:srgbClr val="16A34A"/>
             </a:solidFill>
             <a:prstDash val="solid"/>
           </a:ln>
@@ -41154,13 +40707,13 @@
             <a:r>
               <a:rPr lang="en-US" sz="1100" b="1" dirty="0">
                 <a:solidFill>
-                  <a:srgbClr val="DC2626"/>
+                  <a:srgbClr val="16A34A"/>
                 </a:solidFill>
                 <a:latin typeface="Trebuchet MS" pitchFamily="34" charset="0"/>
                 <a:ea typeface="Trebuchet MS" pitchFamily="34" charset="-122"/>
                 <a:cs typeface="Trebuchet MS" pitchFamily="34" charset="-120"/>
               </a:rPr>
-              <a:t>FALSE</a:t>
+              <a:t>TRUE</a:t>
             </a:r>
             <a:endParaRPr lang="en-US" sz="1100" dirty="0"/>
           </a:p>
@@ -41997,7 +41550,7 @@
                 <a:ea typeface="Trebuchet MS" pitchFamily="34" charset="-122"/>
                 <a:cs typeface="Trebuchet MS" pitchFamily="34" charset="-120"/>
               </a:rPr>
-              <a:t>reductions</a:t>
+              <a:t>reducible</a:t>
             </a:r>
             <a:endParaRPr lang="en-US" sz="1300" dirty="0"/>
           </a:p>
@@ -42129,7 +41682,7 @@
                 <a:ea typeface="Trebuchet MS" pitchFamily="34" charset="-122"/>
                 <a:cs typeface="Trebuchet MS" pitchFamily="34" charset="-120"/>
               </a:rPr>
-              <a:t>reducible</a:t>
+              <a:t>irreducible</a:t>
             </a:r>
             <a:endParaRPr lang="en-US" sz="1300" dirty="0"/>
           </a:p>
@@ -42850,7 +42403,7 @@
                 <a:ea typeface="Trebuchet MS" pitchFamily="34" charset="-122"/>
                 <a:cs typeface="Trebuchet MS" pitchFamily="34" charset="-120"/>
               </a:rPr>
-              <a:t>-tion</a:t>
+              <a:t>-ed</a:t>
             </a:r>
             <a:endParaRPr lang="en-US" sz="1300" dirty="0"/>
           </a:p>
@@ -43067,7 +42620,7 @@
                 <a:ea typeface="Trebuchet MS" pitchFamily="34" charset="-122"/>
                 <a:cs typeface="Trebuchet MS" pitchFamily="34" charset="-120"/>
               </a:rPr>
-              <a:t>pro-</a:t>
+              <a:t>un-</a:t>
             </a:r>
             <a:endParaRPr lang="en-US" sz="1300" dirty="0"/>
           </a:p>
@@ -43156,7 +42709,7 @@
                 <a:ea typeface="Trebuchet MS" pitchFamily="34" charset="-122"/>
                 <a:cs typeface="Trebuchet MS" pitchFamily="34" charset="-120"/>
               </a:rPr>
-              <a:t>-ed</a:t>
+              <a:t>-tion</a:t>
             </a:r>
             <a:endParaRPr lang="en-US" sz="1300" dirty="0"/>
           </a:p>
@@ -43220,7 +42773,7 @@
                 <a:ea typeface="Trebuchet MS" pitchFamily="34" charset="-122"/>
                 <a:cs typeface="Trebuchet MS" pitchFamily="34" charset="-120"/>
               </a:rPr>
-              <a:t>in-</a:t>
+              <a:t>over-</a:t>
             </a:r>
             <a:endParaRPr lang="en-US" sz="1300" dirty="0"/>
           </a:p>
@@ -43309,7 +42862,7 @@
                 <a:ea typeface="Trebuchet MS" pitchFamily="34" charset="-122"/>
                 <a:cs typeface="Trebuchet MS" pitchFamily="34" charset="-120"/>
               </a:rPr>
-              <a:t>-er</a:t>
+              <a:t>-ible</a:t>
             </a:r>
             <a:endParaRPr lang="en-US" sz="1300" dirty="0"/>
           </a:p>
@@ -43373,7 +42926,7 @@
                 <a:ea typeface="Trebuchet MS" pitchFamily="34" charset="-122"/>
                 <a:cs typeface="Trebuchet MS" pitchFamily="34" charset="-120"/>
               </a:rPr>
-              <a:t>de-</a:t>
+              <a:t>sub-</a:t>
             </a:r>
             <a:endParaRPr lang="en-US" sz="1300" dirty="0"/>
           </a:p>
@@ -43462,7 +43015,7 @@
                 <a:ea typeface="Trebuchet MS" pitchFamily="34" charset="-122"/>
                 <a:cs typeface="Trebuchet MS" pitchFamily="34" charset="-120"/>
               </a:rPr>
-              <a:t>-ible</a:t>
+              <a:t>-er</a:t>
             </a:r>
             <a:endParaRPr lang="en-US" sz="1300" dirty="0"/>
           </a:p>
@@ -43740,7 +43293,7 @@
         <p:spPr>
           <a:xfrm>
             <a:off x="4617720" y="4178808"/>
-            <a:ext cx="1097280" cy="420624"/>
+            <a:ext cx="822960" cy="420624"/>
           </a:xfrm>
           <a:prstGeom prst="rect">
             <a:avLst>
@@ -43774,7 +43327,7 @@
         <p:spPr>
           <a:xfrm>
             <a:off x="4617720" y="4178808"/>
-            <a:ext cx="1097280" cy="420624"/>
+            <a:ext cx="822960" cy="420624"/>
           </a:xfrm>
           <a:prstGeom prst="rect">
             <a:avLst/>
@@ -43798,7 +43351,7 @@
                 <a:ea typeface="Trebuchet MS" pitchFamily="34" charset="-122"/>
                 <a:cs typeface="Trebuchet MS" pitchFamily="34" charset="-120"/>
               </a:rPr>
-              <a:t>-tion</a:t>
+              <a:t>-ed</a:t>
             </a:r>
             <a:endParaRPr lang="en-US" sz="1300" dirty="0"/>
           </a:p>
@@ -43812,7 +43365,7 @@
         </p:nvSpPr>
         <p:spPr>
           <a:xfrm>
-            <a:off x="5788152" y="4178808"/>
+            <a:off x="5513832" y="4178808"/>
             <a:ext cx="365760" cy="420624"/>
           </a:xfrm>
           <a:prstGeom prst="rect">
@@ -43851,7 +43404,7 @@
         </p:nvSpPr>
         <p:spPr>
           <a:xfrm>
-            <a:off x="6199632" y="4178808"/>
+            <a:off x="5925312" y="4178808"/>
             <a:ext cx="2194560" cy="420624"/>
           </a:xfrm>
           <a:prstGeom prst="rect">
@@ -43878,7 +43431,7 @@
         </p:nvSpPr>
         <p:spPr>
           <a:xfrm>
-            <a:off x="6199632" y="4178808"/>
+            <a:off x="5925312" y="4178808"/>
             <a:ext cx="2194560" cy="420624"/>
           </a:xfrm>
           <a:prstGeom prst="rect">
@@ -44373,7 +43926,7 @@
                 <a:ea typeface="Calibri" pitchFamily="34" charset="-122"/>
                 <a:cs typeface="Calibri" pitchFamily="34" charset="-120"/>
               </a:rPr>
-              <a:t>More than one decrease or lowering of something, like prices or amounts.</a:t>
+              <a:t>Able to be made smaller or simpler, like a fraction that can be simplified.</a:t>
             </a:r>
             <a:endParaRPr lang="en-US" sz="1200" dirty="0"/>
           </a:p>
@@ -44512,7 +44065,7 @@
                 <a:ea typeface="Calibri" pitchFamily="34" charset="-122"/>
                 <a:cs typeface="Calibri" pitchFamily="34" charset="-120"/>
               </a:rPr>
-              <a:t>The act of making something smaller or the amount it has been made smaller by.</a:t>
+              <a:t>The result of making something smaller, like a big drop in price at the shops.</a:t>
             </a:r>
             <a:endParaRPr lang="en-US" sz="1200" dirty="0"/>
           </a:p>
@@ -44651,7 +44204,7 @@
                 <a:ea typeface="Calibri" pitchFamily="34" charset="-122"/>
                 <a:cs typeface="Calibri" pitchFamily="34" charset="-120"/>
               </a:rPr>
-              <a:t>In the process of making something smaller or less.</a:t>
+              <a:t>The action of making something smaller or less, happening right now.</a:t>
             </a:r>
             <a:endParaRPr lang="en-US" sz="1200" dirty="0"/>
           </a:p>
@@ -44790,7 +44343,7 @@
                 <a:ea typeface="Calibri" pitchFamily="34" charset="-122"/>
                 <a:cs typeface="Calibri" pitchFamily="34" charset="-120"/>
               </a:rPr>
-              <a:t>Able to be made smaller or broken down into simpler parts.</a:t>
+              <a:t>Not able to be made any smaller or simpler, like a fraction already in its simplest form.</a:t>
             </a:r>
             <a:endParaRPr lang="en-US" sz="1200" dirty="0"/>
           </a:p>
@@ -44863,7 +44416,7 @@
                 <a:ea typeface="Trebuchet MS" pitchFamily="34" charset="-122"/>
                 <a:cs typeface="Trebuchet MS" pitchFamily="34" charset="-120"/>
               </a:rPr>
-              <a:t>reductions</a:t>
+              <a:t>reducible</a:t>
             </a:r>
             <a:endParaRPr lang="en-US" sz="1200" dirty="0"/>
           </a:p>
@@ -44929,7 +44482,7 @@
                 <a:ea typeface="Calibri" pitchFamily="34" charset="-122"/>
                 <a:cs typeface="Calibri" pitchFamily="34" charset="-120"/>
               </a:rPr>
-              <a:t>To make something smaller in size, amount, or number.</a:t>
+              <a:t>To make something smaller or less in amount, like reducing the volume on your TV.</a:t>
             </a:r>
             <a:endParaRPr lang="en-US" sz="1200" dirty="0"/>
           </a:p>
@@ -45141,7 +44694,7 @@
                 <a:ea typeface="Trebuchet MS" pitchFamily="34" charset="-122"/>
                 <a:cs typeface="Trebuchet MS" pitchFamily="34" charset="-120"/>
               </a:rPr>
-              <a:t>reducible</a:t>
+              <a:t>irreducible</a:t>
             </a:r>
             <a:endParaRPr lang="en-US" sz="1200" dirty="0"/>
           </a:p>
@@ -45207,7 +44760,7 @@
                 <a:ea typeface="Calibri" pitchFamily="34" charset="-122"/>
                 <a:cs typeface="Calibri" pitchFamily="34" charset="-120"/>
               </a:rPr>
-              <a:t>Made smaller or less than it was before.</a:t>
+              <a:t>Made smaller or less, like a price that has been lowered at a shop.</a:t>
             </a:r>
             <a:endParaRPr lang="en-US" sz="1200" dirty="0"/>
           </a:p>
@@ -45702,7 +45255,7 @@
                 <a:ea typeface="Calibri" pitchFamily="34" charset="-122"/>
                 <a:cs typeface="Calibri" pitchFamily="34" charset="-120"/>
               </a:rPr>
-              <a:t>We need to reduce the amount of plastic we use every day to help protect the environment.</a:t>
+              <a:t>We can help reduce waste by recycling our paper, glass, and plastic at school.</a:t>
             </a:r>
             <a:endParaRPr lang="en-US" sz="1500" dirty="0"/>
           </a:p>
@@ -45866,7 +45419,7 @@
                 <a:ea typeface="Calibri" pitchFamily="34" charset="-122"/>
                 <a:cs typeface="Calibri" pitchFamily="34" charset="-120"/>
               </a:rPr>
-              <a:t>The shop offered a reduction in price on all its winter jackets at the end of the season.</a:t>
+              <a:t>The teacher noticed a big reduction in noise once everyone sat down and got to work.</a:t>
             </a:r>
             <a:endParaRPr lang="en-US" sz="1500" dirty="0"/>
           </a:p>
@@ -46030,7 +45583,7 @@
                 <a:ea typeface="Calibri" pitchFamily="34" charset="-122"/>
                 <a:cs typeface="Calibri" pitchFamily="34" charset="-120"/>
               </a:rPr>
-              <a:t>By reducing the time we spend on screens, we can have more energy for outdoor activities.</a:t>
+              <a:t>Turning off the lights when you leave a room is a great way of reducing your electricity use.</a:t>
             </a:r>
             <a:endParaRPr lang="en-US" sz="1500" dirty="0"/>
           </a:p>
